--- a/ppt/IoT19-MicropythonDev.pptx
+++ b/ppt/IoT19-MicropythonDev.pptx
@@ -5,10 +5,10 @@
     <p:sldMasterId id="2147483653" r:id="rId1"/>
   </p:sldMasterIdLst>
   <p:notesMasterIdLst>
-    <p:notesMasterId r:id="rId34"/>
+    <p:notesMasterId r:id="rId33"/>
   </p:notesMasterIdLst>
   <p:handoutMasterIdLst>
-    <p:handoutMasterId r:id="rId35"/>
+    <p:handoutMasterId r:id="rId34"/>
   </p:handoutMasterIdLst>
   <p:sldIdLst>
     <p:sldId id="264" r:id="rId2"/>
@@ -38,11 +38,10 @@
     <p:sldId id="295" r:id="rId26"/>
     <p:sldId id="305" r:id="rId27"/>
     <p:sldId id="306" r:id="rId28"/>
-    <p:sldId id="307" r:id="rId29"/>
-    <p:sldId id="311" r:id="rId30"/>
-    <p:sldId id="312" r:id="rId31"/>
-    <p:sldId id="310" r:id="rId32"/>
-    <p:sldId id="309" r:id="rId33"/>
+    <p:sldId id="311" r:id="rId29"/>
+    <p:sldId id="312" r:id="rId30"/>
+    <p:sldId id="310" r:id="rId31"/>
+    <p:sldId id="309" r:id="rId32"/>
   </p:sldIdLst>
   <p:sldSz cx="9144000" cy="6858000" type="screen4x3"/>
   <p:notesSz cx="6648450" cy="9782175"/>
@@ -6660,119 +6659,6 @@
           <p:cNvPr id="2" name="Titre 1">
             <a:extLst>
               <a:ext uri="{FF2B5EF4-FFF2-40B4-BE49-F238E27FC236}">
-                <a16:creationId xmlns:a16="http://schemas.microsoft.com/office/drawing/2014/main" id="{05908E98-E14C-28E6-FE38-8DFE65C94CF9}"/>
-              </a:ext>
-            </a:extLst>
-          </p:cNvPr>
-          <p:cNvSpPr>
-            <a:spLocks noGrp="1"/>
-          </p:cNvSpPr>
-          <p:nvPr>
-            <p:ph type="title"/>
-          </p:nvPr>
-        </p:nvSpPr>
-        <p:spPr/>
-        <p:txBody>
-          <a:bodyPr/>
-          <a:lstStyle/>
-          <a:p>
-            <a:r>
-              <a:rPr lang="fr-FR" dirty="0"/>
-              <a:t>TM1637</a:t>
-            </a:r>
-          </a:p>
-        </p:txBody>
-      </p:sp>
-      <p:sp>
-        <p:nvSpPr>
-          <p:cNvPr id="3" name="Espace réservé du contenu 2">
-            <a:extLst>
-              <a:ext uri="{FF2B5EF4-FFF2-40B4-BE49-F238E27FC236}">
-                <a16:creationId xmlns:a16="http://schemas.microsoft.com/office/drawing/2014/main" id="{9EBB19AD-0804-E633-861C-1AA2E80BCD3B}"/>
-              </a:ext>
-            </a:extLst>
-          </p:cNvPr>
-          <p:cNvSpPr>
-            <a:spLocks noGrp="1"/>
-          </p:cNvSpPr>
-          <p:nvPr>
-            <p:ph idx="1"/>
-          </p:nvPr>
-        </p:nvSpPr>
-        <p:spPr/>
-        <p:txBody>
-          <a:bodyPr/>
-          <a:lstStyle/>
-          <a:p>
-            <a:r>
-              <a:rPr lang="fr-FR" dirty="0"/>
-              <a:t>import tm1637</a:t>
-            </a:r>
-          </a:p>
-          <a:p>
-            <a:pPr lvl="1"/>
-            <a:r>
-              <a:rPr lang="fr-FR" dirty="0"/>
-              <a:t>A copier (par </a:t>
-            </a:r>
-            <a:r>
-              <a:rPr lang="fr-FR" dirty="0" err="1"/>
-              <a:t>save</a:t>
-            </a:r>
-            <a:r>
-              <a:rPr lang="fr-FR" dirty="0"/>
-              <a:t> as) sur </a:t>
-            </a:r>
-            <a:r>
-              <a:rPr lang="fr-FR" dirty="0" err="1"/>
-              <a:t>micro-contrôleur</a:t>
-            </a:r>
-            <a:endParaRPr lang="fr-FR" dirty="0"/>
-          </a:p>
-          <a:p>
-            <a:pPr lvl="1"/>
-            <a:r>
-              <a:rPr lang="fr-FR" dirty="0"/>
-              <a:t>Ne fonctionne pas sur mes tests</a:t>
-            </a:r>
-          </a:p>
-        </p:txBody>
-      </p:sp>
-    </p:spTree>
-    <p:extLst>
-      <p:ext uri="{BB962C8B-B14F-4D97-AF65-F5344CB8AC3E}">
-        <p14:creationId xmlns:p14="http://schemas.microsoft.com/office/powerpoint/2010/main" val="499698147"/>
-      </p:ext>
-    </p:extLst>
-  </p:cSld>
-  <p:clrMapOvr>
-    <a:masterClrMapping/>
-  </p:clrMapOvr>
-</p:sld>
-</file>
-
-<file path=ppt/slides/slide29.xml><?xml version="1.0" encoding="utf-8"?>
-<p:sld xmlns:a="http://schemas.openxmlformats.org/drawingml/2006/main" xmlns:r="http://schemas.openxmlformats.org/officeDocument/2006/relationships" xmlns:p="http://schemas.openxmlformats.org/presentationml/2006/main">
-  <p:cSld>
-    <p:spTree>
-      <p:nvGrpSpPr>
-        <p:cNvPr id="1" name=""/>
-        <p:cNvGrpSpPr/>
-        <p:nvPr/>
-      </p:nvGrpSpPr>
-      <p:grpSpPr>
-        <a:xfrm>
-          <a:off x="0" y="0"/>
-          <a:ext cx="0" cy="0"/>
-          <a:chOff x="0" y="0"/>
-          <a:chExt cx="0" cy="0"/>
-        </a:xfrm>
-      </p:grpSpPr>
-      <p:sp>
-        <p:nvSpPr>
-          <p:cNvPr id="2" name="Titre 1">
-            <a:extLst>
-              <a:ext uri="{FF2B5EF4-FFF2-40B4-BE49-F238E27FC236}">
                 <a16:creationId xmlns:a16="http://schemas.microsoft.com/office/drawing/2014/main" id="{3346CC45-1A66-7AB0-971B-AC033DF17F02}"/>
               </a:ext>
             </a:extLst>
@@ -6890,141 +6776,7 @@
 </p:sld>
 </file>
 
-<file path=ppt/slides/slide3.xml><?xml version="1.0" encoding="utf-8"?>
-<p:sld xmlns:a="http://schemas.openxmlformats.org/drawingml/2006/main" xmlns:r="http://schemas.openxmlformats.org/officeDocument/2006/relationships" xmlns:p="http://schemas.openxmlformats.org/presentationml/2006/main">
-  <p:cSld>
-    <p:spTree>
-      <p:nvGrpSpPr>
-        <p:cNvPr id="1" name=""/>
-        <p:cNvGrpSpPr/>
-        <p:nvPr/>
-      </p:nvGrpSpPr>
-      <p:grpSpPr>
-        <a:xfrm>
-          <a:off x="0" y="0"/>
-          <a:ext cx="0" cy="0"/>
-          <a:chOff x="0" y="0"/>
-          <a:chExt cx="0" cy="0"/>
-        </a:xfrm>
-      </p:grpSpPr>
-      <p:sp>
-        <p:nvSpPr>
-          <p:cNvPr id="2" name="Titre 1"/>
-          <p:cNvSpPr>
-            <a:spLocks noGrp="1"/>
-          </p:cNvSpPr>
-          <p:nvPr>
-            <p:ph type="title"/>
-          </p:nvPr>
-        </p:nvSpPr>
-        <p:spPr/>
-        <p:txBody>
-          <a:bodyPr/>
-          <a:lstStyle/>
-          <a:p>
-            <a:r>
-              <a:rPr lang="fr-FR" dirty="0"/>
-              <a:t>Time</a:t>
-            </a:r>
-          </a:p>
-        </p:txBody>
-      </p:sp>
-      <p:sp>
-        <p:nvSpPr>
-          <p:cNvPr id="3" name="Espace réservé du contenu 2"/>
-          <p:cNvSpPr>
-            <a:spLocks noGrp="1"/>
-          </p:cNvSpPr>
-          <p:nvPr>
-            <p:ph idx="1"/>
-          </p:nvPr>
-        </p:nvSpPr>
-        <p:spPr/>
-        <p:txBody>
-          <a:bodyPr/>
-          <a:lstStyle/>
-          <a:p>
-            <a:r>
-              <a:rPr lang="fr-FR" dirty="0"/>
-              <a:t>Une boucle est trop rapide</a:t>
-            </a:r>
-          </a:p>
-          <a:p>
-            <a:r>
-              <a:rPr lang="fr-FR" dirty="0"/>
-              <a:t>Le module time possède les fonctions de </a:t>
-            </a:r>
-            <a:r>
-              <a:rPr lang="fr-FR" dirty="0" err="1"/>
-              <a:t>sleep</a:t>
-            </a:r>
-            <a:endParaRPr lang="fr-FR" dirty="0"/>
-          </a:p>
-          <a:p>
-            <a:r>
-              <a:rPr lang="fr-FR" dirty="0" err="1"/>
-              <a:t>sleep</a:t>
-            </a:r>
-            <a:r>
-              <a:rPr lang="fr-FR" dirty="0"/>
-              <a:t>() permet d'effectuer une pause en seconde</a:t>
-            </a:r>
-          </a:p>
-          <a:p>
-            <a:r>
-              <a:rPr lang="fr-FR" dirty="0" err="1"/>
-              <a:t>sleep_ms</a:t>
-            </a:r>
-            <a:r>
-              <a:rPr lang="fr-FR" dirty="0"/>
-              <a:t>() permet d'effectuer une pause en milliseconde</a:t>
-            </a:r>
-          </a:p>
-          <a:p>
-            <a:r>
-              <a:rPr lang="fr-FR" dirty="0" err="1"/>
-              <a:t>sleep_ms</a:t>
-            </a:r>
-            <a:r>
-              <a:rPr lang="fr-FR" dirty="0"/>
-              <a:t>(1000)</a:t>
-            </a:r>
-          </a:p>
-          <a:p>
-            <a:pPr lvl="1"/>
-            <a:r>
-              <a:rPr lang="fr-FR" dirty="0"/>
-              <a:t>Pause de 1s</a:t>
-            </a:r>
-          </a:p>
-          <a:p>
-            <a:pPr lvl="1"/>
-            <a:r>
-              <a:rPr lang="fr-FR" dirty="0"/>
-              <a:t>Quasi obligatoire dans un </a:t>
-            </a:r>
-            <a:r>
-              <a:rPr lang="fr-FR" dirty="0" err="1"/>
-              <a:t>loop</a:t>
-            </a:r>
-            <a:endParaRPr lang="fr-FR" dirty="0"/>
-          </a:p>
-        </p:txBody>
-      </p:sp>
-    </p:spTree>
-    <p:extLst>
-      <p:ext uri="{BB962C8B-B14F-4D97-AF65-F5344CB8AC3E}">
-        <p14:creationId xmlns:p14="http://schemas.microsoft.com/office/powerpoint/2010/main" val="370465397"/>
-      </p:ext>
-    </p:extLst>
-  </p:cSld>
-  <p:clrMapOvr>
-    <a:masterClrMapping/>
-  </p:clrMapOvr>
-</p:sld>
-</file>
-
-<file path=ppt/slides/slide30.xml><?xml version="1.0" encoding="utf-8"?>
+<file path=ppt/slides/slide29.xml><?xml version="1.0" encoding="utf-8"?>
 <p:sld xmlns:a="http://schemas.openxmlformats.org/drawingml/2006/main" xmlns:r="http://schemas.openxmlformats.org/officeDocument/2006/relationships" xmlns:p="http://schemas.openxmlformats.org/presentationml/2006/main">
   <p:cSld>
     <p:spTree>
@@ -7168,7 +6920,141 @@
 </p:sld>
 </file>
 
-<file path=ppt/slides/slide31.xml><?xml version="1.0" encoding="utf-8"?>
+<file path=ppt/slides/slide3.xml><?xml version="1.0" encoding="utf-8"?>
+<p:sld xmlns:a="http://schemas.openxmlformats.org/drawingml/2006/main" xmlns:r="http://schemas.openxmlformats.org/officeDocument/2006/relationships" xmlns:p="http://schemas.openxmlformats.org/presentationml/2006/main">
+  <p:cSld>
+    <p:spTree>
+      <p:nvGrpSpPr>
+        <p:cNvPr id="1" name=""/>
+        <p:cNvGrpSpPr/>
+        <p:nvPr/>
+      </p:nvGrpSpPr>
+      <p:grpSpPr>
+        <a:xfrm>
+          <a:off x="0" y="0"/>
+          <a:ext cx="0" cy="0"/>
+          <a:chOff x="0" y="0"/>
+          <a:chExt cx="0" cy="0"/>
+        </a:xfrm>
+      </p:grpSpPr>
+      <p:sp>
+        <p:nvSpPr>
+          <p:cNvPr id="2" name="Titre 1"/>
+          <p:cNvSpPr>
+            <a:spLocks noGrp="1"/>
+          </p:cNvSpPr>
+          <p:nvPr>
+            <p:ph type="title"/>
+          </p:nvPr>
+        </p:nvSpPr>
+        <p:spPr/>
+        <p:txBody>
+          <a:bodyPr/>
+          <a:lstStyle/>
+          <a:p>
+            <a:r>
+              <a:rPr lang="fr-FR" dirty="0"/>
+              <a:t>Time</a:t>
+            </a:r>
+          </a:p>
+        </p:txBody>
+      </p:sp>
+      <p:sp>
+        <p:nvSpPr>
+          <p:cNvPr id="3" name="Espace réservé du contenu 2"/>
+          <p:cNvSpPr>
+            <a:spLocks noGrp="1"/>
+          </p:cNvSpPr>
+          <p:nvPr>
+            <p:ph idx="1"/>
+          </p:nvPr>
+        </p:nvSpPr>
+        <p:spPr/>
+        <p:txBody>
+          <a:bodyPr/>
+          <a:lstStyle/>
+          <a:p>
+            <a:r>
+              <a:rPr lang="fr-FR" dirty="0"/>
+              <a:t>Une boucle est trop rapide</a:t>
+            </a:r>
+          </a:p>
+          <a:p>
+            <a:r>
+              <a:rPr lang="fr-FR" dirty="0"/>
+              <a:t>Le module time possède les fonctions de </a:t>
+            </a:r>
+            <a:r>
+              <a:rPr lang="fr-FR" dirty="0" err="1"/>
+              <a:t>sleep</a:t>
+            </a:r>
+            <a:endParaRPr lang="fr-FR" dirty="0"/>
+          </a:p>
+          <a:p>
+            <a:r>
+              <a:rPr lang="fr-FR" dirty="0" err="1"/>
+              <a:t>sleep</a:t>
+            </a:r>
+            <a:r>
+              <a:rPr lang="fr-FR" dirty="0"/>
+              <a:t>() permet d'effectuer une pause en seconde</a:t>
+            </a:r>
+          </a:p>
+          <a:p>
+            <a:r>
+              <a:rPr lang="fr-FR" dirty="0" err="1"/>
+              <a:t>sleep_ms</a:t>
+            </a:r>
+            <a:r>
+              <a:rPr lang="fr-FR" dirty="0"/>
+              <a:t>() permet d'effectuer une pause en milliseconde</a:t>
+            </a:r>
+          </a:p>
+          <a:p>
+            <a:r>
+              <a:rPr lang="fr-FR" dirty="0" err="1"/>
+              <a:t>sleep_ms</a:t>
+            </a:r>
+            <a:r>
+              <a:rPr lang="fr-FR" dirty="0"/>
+              <a:t>(1000)</a:t>
+            </a:r>
+          </a:p>
+          <a:p>
+            <a:pPr lvl="1"/>
+            <a:r>
+              <a:rPr lang="fr-FR" dirty="0"/>
+              <a:t>Pause de 1s</a:t>
+            </a:r>
+          </a:p>
+          <a:p>
+            <a:pPr lvl="1"/>
+            <a:r>
+              <a:rPr lang="fr-FR" dirty="0"/>
+              <a:t>Quasi obligatoire dans un </a:t>
+            </a:r>
+            <a:r>
+              <a:rPr lang="fr-FR" dirty="0" err="1"/>
+              <a:t>loop</a:t>
+            </a:r>
+            <a:endParaRPr lang="fr-FR" dirty="0"/>
+          </a:p>
+        </p:txBody>
+      </p:sp>
+    </p:spTree>
+    <p:extLst>
+      <p:ext uri="{BB962C8B-B14F-4D97-AF65-F5344CB8AC3E}">
+        <p14:creationId xmlns:p14="http://schemas.microsoft.com/office/powerpoint/2010/main" val="370465397"/>
+      </p:ext>
+    </p:extLst>
+  </p:cSld>
+  <p:clrMapOvr>
+    <a:masterClrMapping/>
+  </p:clrMapOvr>
+</p:sld>
+</file>
+
+<file path=ppt/slides/slide30.xml><?xml version="1.0" encoding="utf-8"?>
 <p:sld xmlns:a="http://schemas.openxmlformats.org/drawingml/2006/main" xmlns:r="http://schemas.openxmlformats.org/officeDocument/2006/relationships" xmlns:p="http://schemas.openxmlformats.org/presentationml/2006/main">
   <p:cSld>
     <p:spTree>
@@ -7412,7 +7298,7 @@
 </p:sld>
 </file>
 
-<file path=ppt/slides/slide32.xml><?xml version="1.0" encoding="utf-8"?>
+<file path=ppt/slides/slide31.xml><?xml version="1.0" encoding="utf-8"?>
 <p:sld xmlns:a="http://schemas.openxmlformats.org/drawingml/2006/main" xmlns:r="http://schemas.openxmlformats.org/officeDocument/2006/relationships" xmlns:p="http://schemas.openxmlformats.org/presentationml/2006/main">
   <p:cSld>
     <p:spTree>
@@ -7634,7 +7520,7 @@
             <a:pPr lvl="1"/>
             <a:r>
               <a:rPr lang="fr-FR" dirty="0"/>
-              <a:t>Attention différent de Arduino </a:t>
+              <a:t>Attention : différent de Arduino </a:t>
             </a:r>
             <a:r>
               <a:rPr lang="fr-FR" dirty="0" err="1"/>
@@ -8390,8 +8276,38 @@
         </p:blipFill>
         <p:spPr>
           <a:xfrm>
-            <a:off x="3517362" y="3645023"/>
+            <a:off x="3024535" y="3638008"/>
             <a:ext cx="2926845" cy="3188011"/>
+          </a:xfrm>
+          <a:prstGeom prst="rect">
+            <a:avLst/>
+          </a:prstGeom>
+        </p:spPr>
+      </p:pic>
+      <p:pic>
+        <p:nvPicPr>
+          <p:cNvPr id="6" name="Image 5">
+            <a:extLst>
+              <a:ext uri="{FF2B5EF4-FFF2-40B4-BE49-F238E27FC236}">
+                <a16:creationId xmlns:a16="http://schemas.microsoft.com/office/drawing/2014/main" id="{59C68615-02BC-0350-AA6C-6247691AAB1D}"/>
+              </a:ext>
+            </a:extLst>
+          </p:cNvPr>
+          <p:cNvPicPr>
+            <a:picLocks noChangeAspect="1"/>
+          </p:cNvPicPr>
+          <p:nvPr/>
+        </p:nvPicPr>
+        <p:blipFill>
+          <a:blip r:embed="rId5"/>
+          <a:stretch>
+            <a:fillRect/>
+          </a:stretch>
+        </p:blipFill>
+        <p:spPr>
+          <a:xfrm>
+            <a:off x="6134857" y="3637615"/>
+            <a:ext cx="3077700" cy="3188011"/>
           </a:xfrm>
           <a:prstGeom prst="rect">
             <a:avLst/>

--- a/ppt/IoT19-MicropythonDev.pptx
+++ b/ppt/IoT19-MicropythonDev.pptx
@@ -5,10 +5,10 @@
     <p:sldMasterId id="2147483653" r:id="rId1"/>
   </p:sldMasterIdLst>
   <p:notesMasterIdLst>
-    <p:notesMasterId r:id="rId33"/>
+    <p:notesMasterId r:id="rId34"/>
   </p:notesMasterIdLst>
   <p:handoutMasterIdLst>
-    <p:handoutMasterId r:id="rId34"/>
+    <p:handoutMasterId r:id="rId35"/>
   </p:handoutMasterIdLst>
   <p:sldIdLst>
     <p:sldId id="264" r:id="rId2"/>
@@ -26,22 +26,23 @@
     <p:sldId id="308" r:id="rId14"/>
     <p:sldId id="291" r:id="rId15"/>
     <p:sldId id="300" r:id="rId16"/>
-    <p:sldId id="277" r:id="rId17"/>
-    <p:sldId id="278" r:id="rId18"/>
-    <p:sldId id="294" r:id="rId19"/>
-    <p:sldId id="301" r:id="rId20"/>
-    <p:sldId id="296" r:id="rId21"/>
-    <p:sldId id="289" r:id="rId22"/>
-    <p:sldId id="302" r:id="rId23"/>
-    <p:sldId id="303" r:id="rId24"/>
-    <p:sldId id="279" r:id="rId25"/>
-    <p:sldId id="295" r:id="rId26"/>
-    <p:sldId id="305" r:id="rId27"/>
-    <p:sldId id="306" r:id="rId28"/>
-    <p:sldId id="311" r:id="rId29"/>
-    <p:sldId id="312" r:id="rId30"/>
-    <p:sldId id="310" r:id="rId31"/>
-    <p:sldId id="309" r:id="rId32"/>
+    <p:sldId id="301" r:id="rId17"/>
+    <p:sldId id="313" r:id="rId18"/>
+    <p:sldId id="296" r:id="rId19"/>
+    <p:sldId id="277" r:id="rId20"/>
+    <p:sldId id="278" r:id="rId21"/>
+    <p:sldId id="294" r:id="rId22"/>
+    <p:sldId id="289" r:id="rId23"/>
+    <p:sldId id="302" r:id="rId24"/>
+    <p:sldId id="303" r:id="rId25"/>
+    <p:sldId id="279" r:id="rId26"/>
+    <p:sldId id="295" r:id="rId27"/>
+    <p:sldId id="305" r:id="rId28"/>
+    <p:sldId id="306" r:id="rId29"/>
+    <p:sldId id="311" r:id="rId30"/>
+    <p:sldId id="312" r:id="rId31"/>
+    <p:sldId id="310" r:id="rId32"/>
+    <p:sldId id="309" r:id="rId33"/>
   </p:sldIdLst>
   <p:sldSz cx="9144000" cy="6858000" type="screen4x3"/>
   <p:notesSz cx="6648450" cy="9782175"/>
@@ -4397,21 +4398,14 @@
             <a:pPr lvl="1"/>
             <a:r>
               <a:rPr lang="fr-FR" dirty="0"/>
-              <a:t>4096 correspond ~= 1V</a:t>
-            </a:r>
-          </a:p>
-          <a:p>
-            <a:pPr lvl="1"/>
-            <a:r>
-              <a:rPr lang="fr-FR" dirty="0"/>
-              <a:t>Par de port analogique en Output</a:t>
-            </a:r>
-          </a:p>
-          <a:p>
-            <a:pPr lvl="1"/>
-            <a:r>
-              <a:rPr lang="fr-FR" dirty="0"/>
-              <a:t>Remplacé par des PWM</a:t>
+              <a:t>4096 correspond ~= 1.1V</a:t>
+            </a:r>
+          </a:p>
+          <a:p>
+            <a:pPr lvl="1"/>
+            <a:r>
+              <a:rPr lang="fr-FR" dirty="0"/>
+              <a:t>Uniquement en input</a:t>
             </a:r>
           </a:p>
           <a:p>
@@ -4592,7 +4586,13 @@
       </p:grpSpPr>
       <p:sp>
         <p:nvSpPr>
-          <p:cNvPr id="2" name="Titre 1"/>
+          <p:cNvPr id="2" name="Titre 1">
+            <a:extLst>
+              <a:ext uri="{FF2B5EF4-FFF2-40B4-BE49-F238E27FC236}">
+                <a16:creationId xmlns:a16="http://schemas.microsoft.com/office/drawing/2014/main" id="{32CDD782-1FB6-D38A-C83D-FFA5B5F4C560}"/>
+              </a:ext>
+            </a:extLst>
+          </p:cNvPr>
           <p:cNvSpPr>
             <a:spLocks noGrp="1"/>
           </p:cNvSpPr>
@@ -4607,14 +4607,20 @@
           <a:p>
             <a:r>
               <a:rPr lang="fr-FR" dirty="0"/>
-              <a:t>Lecture Analogique</a:t>
-            </a:r>
-          </a:p>
-        </p:txBody>
-      </p:sp>
-      <p:sp>
-        <p:nvSpPr>
-          <p:cNvPr id="3" name="Espace réservé du contenu 2"/>
+              <a:t>Potentiomètre</a:t>
+            </a:r>
+          </a:p>
+        </p:txBody>
+      </p:sp>
+      <p:sp>
+        <p:nvSpPr>
+          <p:cNvPr id="3" name="Espace réservé du contenu 2">
+            <a:extLst>
+              <a:ext uri="{FF2B5EF4-FFF2-40B4-BE49-F238E27FC236}">
+                <a16:creationId xmlns:a16="http://schemas.microsoft.com/office/drawing/2014/main" id="{0D17C960-E70D-7049-ACC5-44F07F080E5F}"/>
+              </a:ext>
+            </a:extLst>
+          </p:cNvPr>
           <p:cNvSpPr>
             <a:spLocks noGrp="1"/>
           </p:cNvSpPr>
@@ -4629,53 +4635,22 @@
           <a:p>
             <a:r>
               <a:rPr lang="fr-FR" dirty="0"/>
-              <a:t>Les ports analogiques permettent de lire et écrire dans un range 12 bits</a:t>
-            </a:r>
-          </a:p>
-          <a:p>
-            <a:pPr lvl="1"/>
-            <a:r>
-              <a:rPr lang="fr-FR" dirty="0"/>
-              <a:t>Par exemple le potentiomètre</a:t>
-            </a:r>
-          </a:p>
-          <a:p>
-            <a:pPr lvl="1"/>
-            <a:r>
-              <a:rPr lang="fr-FR" dirty="0"/>
-              <a:t>0 =&gt; 0°, 4096 =&gt; 300°, 2048 =&gt; 150°</a:t>
-            </a:r>
-          </a:p>
-          <a:p>
-            <a:r>
-              <a:rPr lang="fr-FR" dirty="0"/>
-              <a:t>Le problème de la conversion se pose alors</a:t>
-            </a:r>
-          </a:p>
-          <a:p>
-            <a:pPr lvl="1"/>
-            <a:r>
-              <a:rPr lang="fr-FR" dirty="0"/>
-              <a:t>Les capteurs ont souvent une conversion linéaire</a:t>
-            </a:r>
-          </a:p>
-          <a:p>
-            <a:pPr lvl="1"/>
-            <a:r>
-              <a:rPr lang="fr-FR" dirty="0"/>
-              <a:t>Par exemple la température est sur 9 bits</a:t>
-            </a:r>
-          </a:p>
-          <a:p>
-            <a:endParaRPr lang="fr-FR" dirty="0"/>
-          </a:p>
-          <a:p>
-            <a:pPr lvl="1"/>
-            <a:endParaRPr lang="fr-FR" dirty="0"/>
-          </a:p>
-          <a:p>
-            <a:pPr lvl="1"/>
-            <a:endParaRPr lang="fr-FR" dirty="0"/>
+              <a:t>Variateur de résistance</a:t>
+            </a:r>
+          </a:p>
+          <a:p>
+            <a:pPr lvl="1"/>
+            <a:r>
+              <a:rPr lang="fr-FR" dirty="0"/>
+              <a:t>Nécessite une résistance interne : 10KOhm</a:t>
+            </a:r>
+          </a:p>
+          <a:p>
+            <a:pPr lvl="1"/>
+            <a:r>
+              <a:rPr lang="fr-FR" dirty="0"/>
+              <a:t>Pour une intensité constante fait varié la tension de 0v à 3.3v</a:t>
+            </a:r>
           </a:p>
           <a:p>
             <a:endParaRPr lang="fr-FR" dirty="0"/>
@@ -4685,7 +4660,7 @@
     </p:spTree>
     <p:extLst>
       <p:ext uri="{BB962C8B-B14F-4D97-AF65-F5344CB8AC3E}">
-        <p14:creationId xmlns:p14="http://schemas.microsoft.com/office/powerpoint/2010/main" val="2182299302"/>
+        <p14:creationId xmlns:p14="http://schemas.microsoft.com/office/powerpoint/2010/main" val="16341552"/>
       </p:ext>
     </p:extLst>
   </p:cSld>
@@ -4696,6 +4671,187 @@
 </file>
 
 <file path=ppt/slides/slide17.xml><?xml version="1.0" encoding="utf-8"?>
+<p:sld xmlns:a="http://schemas.openxmlformats.org/drawingml/2006/main" xmlns:r="http://schemas.openxmlformats.org/officeDocument/2006/relationships" xmlns:p="http://schemas.openxmlformats.org/presentationml/2006/main">
+  <p:cSld>
+    <p:spTree>
+      <p:nvGrpSpPr>
+        <p:cNvPr id="1" name="">
+          <a:extLst>
+            <a:ext uri="{FF2B5EF4-FFF2-40B4-BE49-F238E27FC236}">
+              <a16:creationId xmlns:a16="http://schemas.microsoft.com/office/drawing/2014/main" id="{4E507DFA-D00F-7D2B-6F49-A44971D9CF26}"/>
+            </a:ext>
+          </a:extLst>
+        </p:cNvPr>
+        <p:cNvGrpSpPr/>
+        <p:nvPr/>
+      </p:nvGrpSpPr>
+      <p:grpSpPr>
+        <a:xfrm>
+          <a:off x="0" y="0"/>
+          <a:ext cx="0" cy="0"/>
+          <a:chOff x="0" y="0"/>
+          <a:chExt cx="0" cy="0"/>
+        </a:xfrm>
+      </p:grpSpPr>
+      <p:sp>
+        <p:nvSpPr>
+          <p:cNvPr id="2" name="Titre 1">
+            <a:extLst>
+              <a:ext uri="{FF2B5EF4-FFF2-40B4-BE49-F238E27FC236}">
+                <a16:creationId xmlns:a16="http://schemas.microsoft.com/office/drawing/2014/main" id="{EC8B8AE4-624B-0241-5A57-67057613A432}"/>
+              </a:ext>
+            </a:extLst>
+          </p:cNvPr>
+          <p:cNvSpPr>
+            <a:spLocks noGrp="1"/>
+          </p:cNvSpPr>
+          <p:nvPr>
+            <p:ph type="title"/>
+          </p:nvPr>
+        </p:nvSpPr>
+        <p:spPr/>
+        <p:txBody>
+          <a:bodyPr/>
+          <a:lstStyle/>
+          <a:p>
+            <a:r>
+              <a:rPr lang="fr-FR" dirty="0"/>
+              <a:t>Atténuation</a:t>
+            </a:r>
+          </a:p>
+        </p:txBody>
+      </p:sp>
+      <p:sp>
+        <p:nvSpPr>
+          <p:cNvPr id="3" name="Espace réservé du contenu 2">
+            <a:extLst>
+              <a:ext uri="{FF2B5EF4-FFF2-40B4-BE49-F238E27FC236}">
+                <a16:creationId xmlns:a16="http://schemas.microsoft.com/office/drawing/2014/main" id="{48C28B0E-641B-2F46-D80E-39B4FD0EBF03}"/>
+              </a:ext>
+            </a:extLst>
+          </p:cNvPr>
+          <p:cNvSpPr>
+            <a:spLocks noGrp="1"/>
+          </p:cNvSpPr>
+          <p:nvPr>
+            <p:ph idx="1"/>
+          </p:nvPr>
+        </p:nvSpPr>
+        <p:spPr/>
+        <p:txBody>
+          <a:bodyPr/>
+          <a:lstStyle/>
+          <a:p>
+            <a:r>
+              <a:rPr lang="fr-FR" dirty="0"/>
+              <a:t>Si on branche le potentiomètre, la valeur maximale est atteinte à mi-course</a:t>
+            </a:r>
+          </a:p>
+          <a:p>
+            <a:pPr lvl="1"/>
+            <a:r>
+              <a:rPr lang="fr-FR" dirty="0"/>
+              <a:t>La plage de lecture est par défaut de 0 à 1v</a:t>
+            </a:r>
+          </a:p>
+          <a:p>
+            <a:pPr lvl="1"/>
+            <a:r>
+              <a:rPr lang="fr-FR" dirty="0"/>
+              <a:t>Le paramètre d'atténuation </a:t>
+            </a:r>
+            <a:r>
+              <a:rPr lang="fr-FR" dirty="0" err="1"/>
+              <a:t>atten</a:t>
+            </a:r>
+            <a:r>
+              <a:rPr lang="fr-FR" dirty="0"/>
+              <a:t> permet d'augmenter la plage de lecture</a:t>
+            </a:r>
+          </a:p>
+          <a:p>
+            <a:pPr lvl="1"/>
+            <a:r>
+              <a:rPr lang="fr-FR" dirty="0" err="1"/>
+              <a:t>machine.ADC</a:t>
+            </a:r>
+            <a:r>
+              <a:rPr lang="fr-FR" dirty="0"/>
+              <a:t>(35, </a:t>
+            </a:r>
+            <a:r>
+              <a:rPr lang="fr-FR" dirty="0" err="1"/>
+              <a:t>atten</a:t>
+            </a:r>
+            <a:r>
+              <a:rPr lang="fr-FR" dirty="0"/>
+              <a:t>=machine.ADC.ATTN_11DB)</a:t>
+            </a:r>
+          </a:p>
+          <a:p>
+            <a:pPr lvl="1"/>
+            <a:r>
+              <a:rPr lang="fr-FR" dirty="0"/>
+              <a:t>Ce code permet d'avoir une plage de lecture de 0.1v à 2.5v</a:t>
+            </a:r>
+          </a:p>
+          <a:p>
+            <a:pPr lvl="1"/>
+            <a:endParaRPr lang="fr-FR" dirty="0"/>
+          </a:p>
+          <a:p>
+            <a:pPr lvl="1"/>
+            <a:endParaRPr lang="fr-FR" dirty="0"/>
+          </a:p>
+          <a:p>
+            <a:endParaRPr lang="fr-FR" dirty="0"/>
+          </a:p>
+        </p:txBody>
+      </p:sp>
+      <p:pic>
+        <p:nvPicPr>
+          <p:cNvPr id="7" name="Image 6">
+            <a:extLst>
+              <a:ext uri="{FF2B5EF4-FFF2-40B4-BE49-F238E27FC236}">
+                <a16:creationId xmlns:a16="http://schemas.microsoft.com/office/drawing/2014/main" id="{B2663391-78A1-B3CE-8DD7-3978B9A05C0E}"/>
+              </a:ext>
+            </a:extLst>
+          </p:cNvPr>
+          <p:cNvPicPr>
+            <a:picLocks noChangeAspect="1"/>
+          </p:cNvPicPr>
+          <p:nvPr/>
+        </p:nvPicPr>
+        <p:blipFill>
+          <a:blip r:embed="rId2"/>
+          <a:stretch>
+            <a:fillRect/>
+          </a:stretch>
+        </p:blipFill>
+        <p:spPr>
+          <a:xfrm>
+            <a:off x="2185654" y="5445224"/>
+            <a:ext cx="4772691" cy="1114581"/>
+          </a:xfrm>
+          <a:prstGeom prst="rect">
+            <a:avLst/>
+          </a:prstGeom>
+        </p:spPr>
+      </p:pic>
+    </p:spTree>
+    <p:extLst>
+      <p:ext uri="{BB962C8B-B14F-4D97-AF65-F5344CB8AC3E}">
+        <p14:creationId xmlns:p14="http://schemas.microsoft.com/office/powerpoint/2010/main" val="1174216597"/>
+      </p:ext>
+    </p:extLst>
+  </p:cSld>
+  <p:clrMapOvr>
+    <a:masterClrMapping/>
+  </p:clrMapOvr>
+</p:sld>
+</file>
+
+<file path=ppt/slides/slide18.xml><?xml version="1.0" encoding="utf-8"?>
 <p:sld xmlns:a="http://schemas.openxmlformats.org/drawingml/2006/main" xmlns:r="http://schemas.openxmlformats.org/officeDocument/2006/relationships" xmlns:p="http://schemas.openxmlformats.org/presentationml/2006/main">
   <p:cSld>
     <p:spTree>
@@ -4714,6 +4870,360 @@
       </p:grpSpPr>
       <p:sp>
         <p:nvSpPr>
+          <p:cNvPr id="2" name="Titre 1">
+            <a:extLst>
+              <a:ext uri="{FF2B5EF4-FFF2-40B4-BE49-F238E27FC236}">
+                <a16:creationId xmlns:a16="http://schemas.microsoft.com/office/drawing/2014/main" id="{040EFE90-0953-D6F8-2762-1F8856F398EA}"/>
+              </a:ext>
+            </a:extLst>
+          </p:cNvPr>
+          <p:cNvSpPr>
+            <a:spLocks noGrp="1"/>
+          </p:cNvSpPr>
+          <p:nvPr>
+            <p:ph type="title"/>
+          </p:nvPr>
+        </p:nvSpPr>
+        <p:spPr/>
+        <p:txBody>
+          <a:bodyPr/>
+          <a:lstStyle/>
+          <a:p>
+            <a:r>
+              <a:rPr lang="fr-FR" dirty="0"/>
+              <a:t>Potentiomètre</a:t>
+            </a:r>
+          </a:p>
+        </p:txBody>
+      </p:sp>
+      <p:sp>
+        <p:nvSpPr>
+          <p:cNvPr id="3" name="Espace réservé du contenu 2">
+            <a:extLst>
+              <a:ext uri="{FF2B5EF4-FFF2-40B4-BE49-F238E27FC236}">
+                <a16:creationId xmlns:a16="http://schemas.microsoft.com/office/drawing/2014/main" id="{7BF6044B-9AE5-D9A8-9909-6830D3D7DE80}"/>
+              </a:ext>
+            </a:extLst>
+          </p:cNvPr>
+          <p:cNvSpPr>
+            <a:spLocks noGrp="1"/>
+          </p:cNvSpPr>
+          <p:nvPr>
+            <p:ph idx="1"/>
+          </p:nvPr>
+        </p:nvSpPr>
+        <p:spPr/>
+        <p:txBody>
+          <a:bodyPr/>
+          <a:lstStyle/>
+          <a:p>
+            <a:endParaRPr lang="fr-FR"/>
+          </a:p>
+        </p:txBody>
+      </p:sp>
+      <p:pic>
+        <p:nvPicPr>
+          <p:cNvPr id="5" name="Image 4">
+            <a:extLst>
+              <a:ext uri="{FF2B5EF4-FFF2-40B4-BE49-F238E27FC236}">
+                <a16:creationId xmlns:a16="http://schemas.microsoft.com/office/drawing/2014/main" id="{6A1CF8ED-3787-8C9D-0144-628D1926026B}"/>
+              </a:ext>
+            </a:extLst>
+          </p:cNvPr>
+          <p:cNvPicPr>
+            <a:picLocks noChangeAspect="1"/>
+          </p:cNvPicPr>
+          <p:nvPr/>
+        </p:nvPicPr>
+        <p:blipFill>
+          <a:blip r:embed="rId2"/>
+          <a:stretch>
+            <a:fillRect/>
+          </a:stretch>
+        </p:blipFill>
+        <p:spPr>
+          <a:xfrm>
+            <a:off x="1178363" y="1052736"/>
+            <a:ext cx="6090623" cy="5297127"/>
+          </a:xfrm>
+          <a:prstGeom prst="rect">
+            <a:avLst/>
+          </a:prstGeom>
+        </p:spPr>
+      </p:pic>
+    </p:spTree>
+    <p:extLst>
+      <p:ext uri="{BB962C8B-B14F-4D97-AF65-F5344CB8AC3E}">
+        <p14:creationId xmlns:p14="http://schemas.microsoft.com/office/powerpoint/2010/main" val="1529589931"/>
+      </p:ext>
+    </p:extLst>
+  </p:cSld>
+  <p:clrMapOvr>
+    <a:masterClrMapping/>
+  </p:clrMapOvr>
+</p:sld>
+</file>
+
+<file path=ppt/slides/slide19.xml><?xml version="1.0" encoding="utf-8"?>
+<p:sld xmlns:a="http://schemas.openxmlformats.org/drawingml/2006/main" xmlns:r="http://schemas.openxmlformats.org/officeDocument/2006/relationships" xmlns:p="http://schemas.openxmlformats.org/presentationml/2006/main">
+  <p:cSld>
+    <p:spTree>
+      <p:nvGrpSpPr>
+        <p:cNvPr id="1" name=""/>
+        <p:cNvGrpSpPr/>
+        <p:nvPr/>
+      </p:nvGrpSpPr>
+      <p:grpSpPr>
+        <a:xfrm>
+          <a:off x="0" y="0"/>
+          <a:ext cx="0" cy="0"/>
+          <a:chOff x="0" y="0"/>
+          <a:chExt cx="0" cy="0"/>
+        </a:xfrm>
+      </p:grpSpPr>
+      <p:sp>
+        <p:nvSpPr>
+          <p:cNvPr id="2" name="Titre 1"/>
+          <p:cNvSpPr>
+            <a:spLocks noGrp="1"/>
+          </p:cNvSpPr>
+          <p:nvPr>
+            <p:ph type="title"/>
+          </p:nvPr>
+        </p:nvSpPr>
+        <p:spPr/>
+        <p:txBody>
+          <a:bodyPr/>
+          <a:lstStyle/>
+          <a:p>
+            <a:r>
+              <a:rPr lang="fr-FR" dirty="0"/>
+              <a:t>Lecture Analogique</a:t>
+            </a:r>
+          </a:p>
+        </p:txBody>
+      </p:sp>
+      <p:sp>
+        <p:nvSpPr>
+          <p:cNvPr id="3" name="Espace réservé du contenu 2"/>
+          <p:cNvSpPr>
+            <a:spLocks noGrp="1"/>
+          </p:cNvSpPr>
+          <p:nvPr>
+            <p:ph idx="1"/>
+          </p:nvPr>
+        </p:nvSpPr>
+        <p:spPr/>
+        <p:txBody>
+          <a:bodyPr/>
+          <a:lstStyle/>
+          <a:p>
+            <a:r>
+              <a:rPr lang="fr-FR" dirty="0"/>
+              <a:t>Les ports analogiques permettent de lire et écrire dans un range 12 bits</a:t>
+            </a:r>
+          </a:p>
+          <a:p>
+            <a:pPr lvl="1"/>
+            <a:r>
+              <a:rPr lang="fr-FR" dirty="0"/>
+              <a:t>Par exemple le potentiomètre</a:t>
+            </a:r>
+          </a:p>
+          <a:p>
+            <a:pPr lvl="1"/>
+            <a:r>
+              <a:rPr lang="fr-FR" dirty="0"/>
+              <a:t>0 =&gt; 0°, 4096 =&gt; 300°, 2048 =&gt; 150°</a:t>
+            </a:r>
+          </a:p>
+          <a:p>
+            <a:r>
+              <a:rPr lang="fr-FR" dirty="0"/>
+              <a:t>Le problème de la conversion se pose alors</a:t>
+            </a:r>
+          </a:p>
+          <a:p>
+            <a:pPr lvl="1"/>
+            <a:r>
+              <a:rPr lang="fr-FR" dirty="0"/>
+              <a:t>Les capteurs ont souvent une conversion linéaire</a:t>
+            </a:r>
+          </a:p>
+          <a:p>
+            <a:pPr lvl="1"/>
+            <a:r>
+              <a:rPr lang="fr-FR" dirty="0"/>
+              <a:t>Par exemple la température est sur 9 bits</a:t>
+            </a:r>
+          </a:p>
+          <a:p>
+            <a:endParaRPr lang="fr-FR" dirty="0"/>
+          </a:p>
+          <a:p>
+            <a:pPr lvl="1"/>
+            <a:endParaRPr lang="fr-FR" dirty="0"/>
+          </a:p>
+          <a:p>
+            <a:pPr lvl="1"/>
+            <a:endParaRPr lang="fr-FR" dirty="0"/>
+          </a:p>
+          <a:p>
+            <a:endParaRPr lang="fr-FR" dirty="0"/>
+          </a:p>
+        </p:txBody>
+      </p:sp>
+    </p:spTree>
+    <p:extLst>
+      <p:ext uri="{BB962C8B-B14F-4D97-AF65-F5344CB8AC3E}">
+        <p14:creationId xmlns:p14="http://schemas.microsoft.com/office/powerpoint/2010/main" val="1432902424"/>
+      </p:ext>
+    </p:extLst>
+  </p:cSld>
+  <p:clrMapOvr>
+    <a:masterClrMapping/>
+  </p:clrMapOvr>
+</p:sld>
+</file>
+
+<file path=ppt/slides/slide2.xml><?xml version="1.0" encoding="utf-8"?>
+<p:sld xmlns:a="http://schemas.openxmlformats.org/drawingml/2006/main" xmlns:r="http://schemas.openxmlformats.org/officeDocument/2006/relationships" xmlns:p="http://schemas.openxmlformats.org/presentationml/2006/main">
+  <p:cSld>
+    <p:spTree>
+      <p:nvGrpSpPr>
+        <p:cNvPr id="1" name=""/>
+        <p:cNvGrpSpPr/>
+        <p:nvPr/>
+      </p:nvGrpSpPr>
+      <p:grpSpPr>
+        <a:xfrm>
+          <a:off x="0" y="0"/>
+          <a:ext cx="0" cy="0"/>
+          <a:chOff x="0" y="0"/>
+          <a:chExt cx="0" cy="0"/>
+        </a:xfrm>
+      </p:grpSpPr>
+      <p:sp>
+        <p:nvSpPr>
+          <p:cNvPr id="2" name="Titre 1"/>
+          <p:cNvSpPr>
+            <a:spLocks noGrp="1"/>
+          </p:cNvSpPr>
+          <p:nvPr>
+            <p:ph type="title"/>
+          </p:nvPr>
+        </p:nvSpPr>
+        <p:spPr/>
+        <p:txBody>
+          <a:bodyPr/>
+          <a:lstStyle/>
+          <a:p>
+            <a:r>
+              <a:rPr lang="fr-FR" dirty="0"/>
+              <a:t>Structure du programme</a:t>
+            </a:r>
+          </a:p>
+        </p:txBody>
+      </p:sp>
+      <p:sp>
+        <p:nvSpPr>
+          <p:cNvPr id="3" name="Espace réservé du contenu 2"/>
+          <p:cNvSpPr>
+            <a:spLocks noGrp="1"/>
+          </p:cNvSpPr>
+          <p:nvPr>
+            <p:ph idx="1"/>
+          </p:nvPr>
+        </p:nvSpPr>
+        <p:spPr/>
+        <p:txBody>
+          <a:bodyPr/>
+          <a:lstStyle/>
+          <a:p>
+            <a:r>
+              <a:rPr lang="fr-FR" dirty="0"/>
+              <a:t>Un bloc d'import</a:t>
+            </a:r>
+          </a:p>
+          <a:p>
+            <a:r>
+              <a:rPr lang="fr-FR" dirty="0"/>
+              <a:t>Une initialisation des variables</a:t>
+            </a:r>
+          </a:p>
+          <a:p>
+            <a:r>
+              <a:rPr lang="fr-FR" dirty="0"/>
+              <a:t>Une boucle infinie</a:t>
+            </a:r>
+          </a:p>
+          <a:p>
+            <a:endParaRPr lang="fr-FR" dirty="0"/>
+          </a:p>
+        </p:txBody>
+      </p:sp>
+      <p:pic>
+        <p:nvPicPr>
+          <p:cNvPr id="6" name="Image 5">
+            <a:extLst>
+              <a:ext uri="{FF2B5EF4-FFF2-40B4-BE49-F238E27FC236}">
+                <a16:creationId xmlns:a16="http://schemas.microsoft.com/office/drawing/2014/main" id="{241869F1-490E-6844-55BF-21D4DC9497E4}"/>
+              </a:ext>
+            </a:extLst>
+          </p:cNvPr>
+          <p:cNvPicPr>
+            <a:picLocks noChangeAspect="1"/>
+          </p:cNvPicPr>
+          <p:nvPr/>
+        </p:nvPicPr>
+        <p:blipFill>
+          <a:blip r:embed="rId2"/>
+          <a:stretch>
+            <a:fillRect/>
+          </a:stretch>
+        </p:blipFill>
+        <p:spPr>
+          <a:xfrm>
+            <a:off x="2267744" y="3068960"/>
+            <a:ext cx="4210638" cy="2800741"/>
+          </a:xfrm>
+          <a:prstGeom prst="rect">
+            <a:avLst/>
+          </a:prstGeom>
+        </p:spPr>
+      </p:pic>
+    </p:spTree>
+    <p:extLst>
+      <p:ext uri="{BB962C8B-B14F-4D97-AF65-F5344CB8AC3E}">
+        <p14:creationId xmlns:p14="http://schemas.microsoft.com/office/powerpoint/2010/main" val="3654056196"/>
+      </p:ext>
+    </p:extLst>
+  </p:cSld>
+  <p:clrMapOvr>
+    <a:masterClrMapping/>
+  </p:clrMapOvr>
+</p:sld>
+</file>
+
+<file path=ppt/slides/slide20.xml><?xml version="1.0" encoding="utf-8"?>
+<p:sld xmlns:a="http://schemas.openxmlformats.org/drawingml/2006/main" xmlns:r="http://schemas.openxmlformats.org/officeDocument/2006/relationships" xmlns:p="http://schemas.openxmlformats.org/presentationml/2006/main">
+  <p:cSld>
+    <p:spTree>
+      <p:nvGrpSpPr>
+        <p:cNvPr id="1" name=""/>
+        <p:cNvGrpSpPr/>
+        <p:nvPr/>
+      </p:nvGrpSpPr>
+      <p:grpSpPr>
+        <a:xfrm>
+          <a:off x="0" y="0"/>
+          <a:ext cx="0" cy="0"/>
+          <a:chOff x="0" y="0"/>
+          <a:chExt cx="0" cy="0"/>
+        </a:xfrm>
+      </p:grpSpPr>
+      <p:sp>
+        <p:nvSpPr>
           <p:cNvPr id="2" name="Titre 1"/>
           <p:cNvSpPr>
             <a:spLocks noGrp="1"/>
@@ -4790,7 +5300,7 @@
             <a:pPr lvl="1"/>
             <a:r>
               <a:rPr lang="fr-FR" sz="2000" dirty="0"/>
-              <a:t>R = 22KOhm pour ramener à 1V</a:t>
+              <a:t>Atténuation de 11db</a:t>
             </a:r>
           </a:p>
           <a:p>
@@ -4803,7 +5313,7 @@
             <a:pPr lvl="1"/>
             <a:r>
               <a:rPr lang="pt-BR" sz="2000" dirty="0"/>
-              <a:t>float R = 1023.0/a-1.0;</a:t>
+              <a:t> = 1023.0/a-1.0;</a:t>
             </a:r>
           </a:p>
           <a:p>
@@ -4817,7 +5327,7 @@
             <a:pPr lvl="1"/>
             <a:r>
               <a:rPr lang="pt-BR" sz="2000" dirty="0"/>
-              <a:t>float kelvin= 1.0/(log(R/R0)/B+1/298.15)</a:t>
+              <a:t>kelvin= 1.0/(log(R/R0)/B+1/298.15)</a:t>
             </a:r>
           </a:p>
           <a:p>
@@ -4861,7 +5371,7 @@
     </p:spTree>
     <p:extLst>
       <p:ext uri="{BB962C8B-B14F-4D97-AF65-F5344CB8AC3E}">
-        <p14:creationId xmlns:p14="http://schemas.microsoft.com/office/powerpoint/2010/main" val="3607917071"/>
+        <p14:creationId xmlns:p14="http://schemas.microsoft.com/office/powerpoint/2010/main" val="3889073483"/>
       </p:ext>
     </p:extLst>
   </p:cSld>
@@ -4871,7 +5381,7 @@
 </p:sld>
 </file>
 
-<file path=ppt/slides/slide18.xml><?xml version="1.0" encoding="utf-8"?>
+<file path=ppt/slides/slide21.xml><?xml version="1.0" encoding="utf-8"?>
 <p:sld xmlns:a="http://schemas.openxmlformats.org/drawingml/2006/main" xmlns:r="http://schemas.openxmlformats.org/officeDocument/2006/relationships" xmlns:p="http://schemas.openxmlformats.org/presentationml/2006/main">
   <p:cSld>
     <p:spTree>
@@ -5187,7 +5697,7 @@
     </p:spTree>
     <p:extLst>
       <p:ext uri="{BB962C8B-B14F-4D97-AF65-F5344CB8AC3E}">
-        <p14:creationId xmlns:p14="http://schemas.microsoft.com/office/powerpoint/2010/main" val="3958057765"/>
+        <p14:creationId xmlns:p14="http://schemas.microsoft.com/office/powerpoint/2010/main" val="1808572906"/>
       </p:ext>
     </p:extLst>
   </p:cSld>
@@ -5197,431 +5707,7 @@
 </p:sld>
 </file>
 
-<file path=ppt/slides/slide19.xml><?xml version="1.0" encoding="utf-8"?>
-<p:sld xmlns:a="http://schemas.openxmlformats.org/drawingml/2006/main" xmlns:r="http://schemas.openxmlformats.org/officeDocument/2006/relationships" xmlns:p="http://schemas.openxmlformats.org/presentationml/2006/main">
-  <p:cSld>
-    <p:spTree>
-      <p:nvGrpSpPr>
-        <p:cNvPr id="1" name=""/>
-        <p:cNvGrpSpPr/>
-        <p:nvPr/>
-      </p:nvGrpSpPr>
-      <p:grpSpPr>
-        <a:xfrm>
-          <a:off x="0" y="0"/>
-          <a:ext cx="0" cy="0"/>
-          <a:chOff x="0" y="0"/>
-          <a:chExt cx="0" cy="0"/>
-        </a:xfrm>
-      </p:grpSpPr>
-      <p:sp>
-        <p:nvSpPr>
-          <p:cNvPr id="2" name="Titre 1">
-            <a:extLst>
-              <a:ext uri="{FF2B5EF4-FFF2-40B4-BE49-F238E27FC236}">
-                <a16:creationId xmlns:a16="http://schemas.microsoft.com/office/drawing/2014/main" id="{32CDD782-1FB6-D38A-C83D-FFA5B5F4C560}"/>
-              </a:ext>
-            </a:extLst>
-          </p:cNvPr>
-          <p:cNvSpPr>
-            <a:spLocks noGrp="1"/>
-          </p:cNvSpPr>
-          <p:nvPr>
-            <p:ph type="title"/>
-          </p:nvPr>
-        </p:nvSpPr>
-        <p:spPr/>
-        <p:txBody>
-          <a:bodyPr/>
-          <a:lstStyle/>
-          <a:p>
-            <a:r>
-              <a:rPr lang="fr-FR" dirty="0"/>
-              <a:t>Potentiomètre</a:t>
-            </a:r>
-          </a:p>
-        </p:txBody>
-      </p:sp>
-      <p:sp>
-        <p:nvSpPr>
-          <p:cNvPr id="3" name="Espace réservé du contenu 2">
-            <a:extLst>
-              <a:ext uri="{FF2B5EF4-FFF2-40B4-BE49-F238E27FC236}">
-                <a16:creationId xmlns:a16="http://schemas.microsoft.com/office/drawing/2014/main" id="{0D17C960-E70D-7049-ACC5-44F07F080E5F}"/>
-              </a:ext>
-            </a:extLst>
-          </p:cNvPr>
-          <p:cNvSpPr>
-            <a:spLocks noGrp="1"/>
-          </p:cNvSpPr>
-          <p:nvPr>
-            <p:ph idx="1"/>
-          </p:nvPr>
-        </p:nvSpPr>
-        <p:spPr/>
-        <p:txBody>
-          <a:bodyPr/>
-          <a:lstStyle/>
-          <a:p>
-            <a:r>
-              <a:rPr lang="fr-FR" dirty="0"/>
-              <a:t>Variateur de tension</a:t>
-            </a:r>
-          </a:p>
-          <a:p>
-            <a:pPr lvl="1"/>
-            <a:r>
-              <a:rPr lang="fr-FR" dirty="0"/>
-              <a:t>Nécessite une résistance interne : 10KOhm</a:t>
-            </a:r>
-          </a:p>
-          <a:p>
-            <a:pPr lvl="1"/>
-            <a:r>
-              <a:rPr lang="fr-FR" dirty="0"/>
-              <a:t>Grove fonctionne</a:t>
-            </a:r>
-          </a:p>
-          <a:p>
-            <a:r>
-              <a:rPr lang="fr-FR" dirty="0"/>
-              <a:t>Atténuation</a:t>
-            </a:r>
-          </a:p>
-          <a:p>
-            <a:pPr lvl="1"/>
-            <a:r>
-              <a:rPr lang="fr-FR" dirty="0"/>
-              <a:t>Si on branche le potentiomètre, la valeur maximale est atteinte à mi-course</a:t>
-            </a:r>
-          </a:p>
-          <a:p>
-            <a:pPr lvl="1"/>
-            <a:r>
-              <a:rPr lang="fr-FR" dirty="0"/>
-              <a:t>Pour utiliser toute l'amplitude du potentiomètre il faut augmenter la plage de lecture (0v – 1v) à (0v – 2.5v)</a:t>
-            </a:r>
-          </a:p>
-          <a:p>
-            <a:pPr lvl="1"/>
-            <a:r>
-              <a:rPr lang="fr-FR" dirty="0"/>
-              <a:t>Paramètre </a:t>
-            </a:r>
-            <a:r>
-              <a:rPr lang="fr-FR" dirty="0" err="1"/>
-              <a:t>atten</a:t>
-            </a:r>
-            <a:endParaRPr lang="fr-FR" dirty="0"/>
-          </a:p>
-          <a:p>
-            <a:pPr lvl="1"/>
-            <a:r>
-              <a:rPr lang="fr-FR" dirty="0" err="1"/>
-              <a:t>machine.ADC</a:t>
-            </a:r>
-            <a:r>
-              <a:rPr lang="fr-FR" dirty="0"/>
-              <a:t>(35, </a:t>
-            </a:r>
-            <a:r>
-              <a:rPr lang="fr-FR" dirty="0" err="1"/>
-              <a:t>atten</a:t>
-            </a:r>
-            <a:r>
-              <a:rPr lang="fr-FR" dirty="0"/>
-              <a:t>=machine.ADC.ATTN_11DB)</a:t>
-            </a:r>
-          </a:p>
-          <a:p>
-            <a:pPr lvl="1"/>
-            <a:endParaRPr lang="fr-FR" dirty="0"/>
-          </a:p>
-          <a:p>
-            <a:pPr lvl="1"/>
-            <a:endParaRPr lang="fr-FR" dirty="0"/>
-          </a:p>
-          <a:p>
-            <a:endParaRPr lang="fr-FR" dirty="0"/>
-          </a:p>
-        </p:txBody>
-      </p:sp>
-      <p:pic>
-        <p:nvPicPr>
-          <p:cNvPr id="7" name="Image 6">
-            <a:extLst>
-              <a:ext uri="{FF2B5EF4-FFF2-40B4-BE49-F238E27FC236}">
-                <a16:creationId xmlns:a16="http://schemas.microsoft.com/office/drawing/2014/main" id="{4CDA3EFC-F355-69C7-6691-60A66CF21B26}"/>
-              </a:ext>
-            </a:extLst>
-          </p:cNvPr>
-          <p:cNvPicPr>
-            <a:picLocks noChangeAspect="1"/>
-          </p:cNvPicPr>
-          <p:nvPr/>
-        </p:nvPicPr>
-        <p:blipFill>
-          <a:blip r:embed="rId2"/>
-          <a:stretch>
-            <a:fillRect/>
-          </a:stretch>
-        </p:blipFill>
-        <p:spPr>
-          <a:xfrm>
-            <a:off x="2185654" y="5445224"/>
-            <a:ext cx="4772691" cy="1114581"/>
-          </a:xfrm>
-          <a:prstGeom prst="rect">
-            <a:avLst/>
-          </a:prstGeom>
-        </p:spPr>
-      </p:pic>
-    </p:spTree>
-    <p:extLst>
-      <p:ext uri="{BB962C8B-B14F-4D97-AF65-F5344CB8AC3E}">
-        <p14:creationId xmlns:p14="http://schemas.microsoft.com/office/powerpoint/2010/main" val="16341552"/>
-      </p:ext>
-    </p:extLst>
-  </p:cSld>
-  <p:clrMapOvr>
-    <a:masterClrMapping/>
-  </p:clrMapOvr>
-</p:sld>
-</file>
-
-<file path=ppt/slides/slide2.xml><?xml version="1.0" encoding="utf-8"?>
-<p:sld xmlns:a="http://schemas.openxmlformats.org/drawingml/2006/main" xmlns:r="http://schemas.openxmlformats.org/officeDocument/2006/relationships" xmlns:p="http://schemas.openxmlformats.org/presentationml/2006/main">
-  <p:cSld>
-    <p:spTree>
-      <p:nvGrpSpPr>
-        <p:cNvPr id="1" name=""/>
-        <p:cNvGrpSpPr/>
-        <p:nvPr/>
-      </p:nvGrpSpPr>
-      <p:grpSpPr>
-        <a:xfrm>
-          <a:off x="0" y="0"/>
-          <a:ext cx="0" cy="0"/>
-          <a:chOff x="0" y="0"/>
-          <a:chExt cx="0" cy="0"/>
-        </a:xfrm>
-      </p:grpSpPr>
-      <p:sp>
-        <p:nvSpPr>
-          <p:cNvPr id="2" name="Titre 1"/>
-          <p:cNvSpPr>
-            <a:spLocks noGrp="1"/>
-          </p:cNvSpPr>
-          <p:nvPr>
-            <p:ph type="title"/>
-          </p:nvPr>
-        </p:nvSpPr>
-        <p:spPr/>
-        <p:txBody>
-          <a:bodyPr/>
-          <a:lstStyle/>
-          <a:p>
-            <a:r>
-              <a:rPr lang="fr-FR" dirty="0"/>
-              <a:t>Structure du programme</a:t>
-            </a:r>
-          </a:p>
-        </p:txBody>
-      </p:sp>
-      <p:sp>
-        <p:nvSpPr>
-          <p:cNvPr id="3" name="Espace réservé du contenu 2"/>
-          <p:cNvSpPr>
-            <a:spLocks noGrp="1"/>
-          </p:cNvSpPr>
-          <p:nvPr>
-            <p:ph idx="1"/>
-          </p:nvPr>
-        </p:nvSpPr>
-        <p:spPr/>
-        <p:txBody>
-          <a:bodyPr/>
-          <a:lstStyle/>
-          <a:p>
-            <a:r>
-              <a:rPr lang="fr-FR" dirty="0"/>
-              <a:t>Un bloc d'import</a:t>
-            </a:r>
-          </a:p>
-          <a:p>
-            <a:r>
-              <a:rPr lang="fr-FR" dirty="0"/>
-              <a:t>Une initialisation des variables</a:t>
-            </a:r>
-          </a:p>
-          <a:p>
-            <a:r>
-              <a:rPr lang="fr-FR" dirty="0"/>
-              <a:t>Une boucle infinie</a:t>
-            </a:r>
-          </a:p>
-          <a:p>
-            <a:endParaRPr lang="fr-FR" dirty="0"/>
-          </a:p>
-        </p:txBody>
-      </p:sp>
-      <p:pic>
-        <p:nvPicPr>
-          <p:cNvPr id="6" name="Image 5">
-            <a:extLst>
-              <a:ext uri="{FF2B5EF4-FFF2-40B4-BE49-F238E27FC236}">
-                <a16:creationId xmlns:a16="http://schemas.microsoft.com/office/drawing/2014/main" id="{241869F1-490E-6844-55BF-21D4DC9497E4}"/>
-              </a:ext>
-            </a:extLst>
-          </p:cNvPr>
-          <p:cNvPicPr>
-            <a:picLocks noChangeAspect="1"/>
-          </p:cNvPicPr>
-          <p:nvPr/>
-        </p:nvPicPr>
-        <p:blipFill>
-          <a:blip r:embed="rId2"/>
-          <a:stretch>
-            <a:fillRect/>
-          </a:stretch>
-        </p:blipFill>
-        <p:spPr>
-          <a:xfrm>
-            <a:off x="2267744" y="3068960"/>
-            <a:ext cx="4210638" cy="2800741"/>
-          </a:xfrm>
-          <a:prstGeom prst="rect">
-            <a:avLst/>
-          </a:prstGeom>
-        </p:spPr>
-      </p:pic>
-    </p:spTree>
-    <p:extLst>
-      <p:ext uri="{BB962C8B-B14F-4D97-AF65-F5344CB8AC3E}">
-        <p14:creationId xmlns:p14="http://schemas.microsoft.com/office/powerpoint/2010/main" val="3654056196"/>
-      </p:ext>
-    </p:extLst>
-  </p:cSld>
-  <p:clrMapOvr>
-    <a:masterClrMapping/>
-  </p:clrMapOvr>
-</p:sld>
-</file>
-
-<file path=ppt/slides/slide20.xml><?xml version="1.0" encoding="utf-8"?>
-<p:sld xmlns:a="http://schemas.openxmlformats.org/drawingml/2006/main" xmlns:r="http://schemas.openxmlformats.org/officeDocument/2006/relationships" xmlns:p="http://schemas.openxmlformats.org/presentationml/2006/main">
-  <p:cSld>
-    <p:spTree>
-      <p:nvGrpSpPr>
-        <p:cNvPr id="1" name=""/>
-        <p:cNvGrpSpPr/>
-        <p:nvPr/>
-      </p:nvGrpSpPr>
-      <p:grpSpPr>
-        <a:xfrm>
-          <a:off x="0" y="0"/>
-          <a:ext cx="0" cy="0"/>
-          <a:chOff x="0" y="0"/>
-          <a:chExt cx="0" cy="0"/>
-        </a:xfrm>
-      </p:grpSpPr>
-      <p:sp>
-        <p:nvSpPr>
-          <p:cNvPr id="2" name="Titre 1">
-            <a:extLst>
-              <a:ext uri="{FF2B5EF4-FFF2-40B4-BE49-F238E27FC236}">
-                <a16:creationId xmlns:a16="http://schemas.microsoft.com/office/drawing/2014/main" id="{040EFE90-0953-D6F8-2762-1F8856F398EA}"/>
-              </a:ext>
-            </a:extLst>
-          </p:cNvPr>
-          <p:cNvSpPr>
-            <a:spLocks noGrp="1"/>
-          </p:cNvSpPr>
-          <p:nvPr>
-            <p:ph type="title"/>
-          </p:nvPr>
-        </p:nvSpPr>
-        <p:spPr/>
-        <p:txBody>
-          <a:bodyPr/>
-          <a:lstStyle/>
-          <a:p>
-            <a:r>
-              <a:rPr lang="fr-FR" dirty="0"/>
-              <a:t>Potentiomètre</a:t>
-            </a:r>
-          </a:p>
-        </p:txBody>
-      </p:sp>
-      <p:sp>
-        <p:nvSpPr>
-          <p:cNvPr id="3" name="Espace réservé du contenu 2">
-            <a:extLst>
-              <a:ext uri="{FF2B5EF4-FFF2-40B4-BE49-F238E27FC236}">
-                <a16:creationId xmlns:a16="http://schemas.microsoft.com/office/drawing/2014/main" id="{7BF6044B-9AE5-D9A8-9909-6830D3D7DE80}"/>
-              </a:ext>
-            </a:extLst>
-          </p:cNvPr>
-          <p:cNvSpPr>
-            <a:spLocks noGrp="1"/>
-          </p:cNvSpPr>
-          <p:nvPr>
-            <p:ph idx="1"/>
-          </p:nvPr>
-        </p:nvSpPr>
-        <p:spPr/>
-        <p:txBody>
-          <a:bodyPr/>
-          <a:lstStyle/>
-          <a:p>
-            <a:endParaRPr lang="fr-FR"/>
-          </a:p>
-        </p:txBody>
-      </p:sp>
-      <p:pic>
-        <p:nvPicPr>
-          <p:cNvPr id="5" name="Image 4">
-            <a:extLst>
-              <a:ext uri="{FF2B5EF4-FFF2-40B4-BE49-F238E27FC236}">
-                <a16:creationId xmlns:a16="http://schemas.microsoft.com/office/drawing/2014/main" id="{6A1CF8ED-3787-8C9D-0144-628D1926026B}"/>
-              </a:ext>
-            </a:extLst>
-          </p:cNvPr>
-          <p:cNvPicPr>
-            <a:picLocks noChangeAspect="1"/>
-          </p:cNvPicPr>
-          <p:nvPr/>
-        </p:nvPicPr>
-        <p:blipFill>
-          <a:blip r:embed="rId2"/>
-          <a:stretch>
-            <a:fillRect/>
-          </a:stretch>
-        </p:blipFill>
-        <p:spPr>
-          <a:xfrm>
-            <a:off x="1178363" y="1052736"/>
-            <a:ext cx="6090623" cy="5297127"/>
-          </a:xfrm>
-          <a:prstGeom prst="rect">
-            <a:avLst/>
-          </a:prstGeom>
-        </p:spPr>
-      </p:pic>
-    </p:spTree>
-    <p:extLst>
-      <p:ext uri="{BB962C8B-B14F-4D97-AF65-F5344CB8AC3E}">
-        <p14:creationId xmlns:p14="http://schemas.microsoft.com/office/powerpoint/2010/main" val="1529589931"/>
-      </p:ext>
-    </p:extLst>
-  </p:cSld>
-  <p:clrMapOvr>
-    <a:masterClrMapping/>
-  </p:clrMapOvr>
-</p:sld>
-</file>
-
-<file path=ppt/slides/slide21.xml><?xml version="1.0" encoding="utf-8"?>
+<file path=ppt/slides/slide22.xml><?xml version="1.0" encoding="utf-8"?>
 <p:sld xmlns:a="http://schemas.openxmlformats.org/drawingml/2006/main" xmlns:r="http://schemas.openxmlformats.org/officeDocument/2006/relationships" xmlns:p="http://schemas.openxmlformats.org/presentationml/2006/main">
   <p:cSld>
     <p:spTree>
@@ -5859,144 +5945,6 @@
 </p:sld>
 </file>
 
-<file path=ppt/slides/slide22.xml><?xml version="1.0" encoding="utf-8"?>
-<p:sld xmlns:a="http://schemas.openxmlformats.org/drawingml/2006/main" xmlns:r="http://schemas.openxmlformats.org/officeDocument/2006/relationships" xmlns:p="http://schemas.openxmlformats.org/presentationml/2006/main">
-  <p:cSld>
-    <p:spTree>
-      <p:nvGrpSpPr>
-        <p:cNvPr id="1" name=""/>
-        <p:cNvGrpSpPr/>
-        <p:nvPr/>
-      </p:nvGrpSpPr>
-      <p:grpSpPr>
-        <a:xfrm>
-          <a:off x="0" y="0"/>
-          <a:ext cx="0" cy="0"/>
-          <a:chOff x="0" y="0"/>
-          <a:chExt cx="0" cy="0"/>
-        </a:xfrm>
-      </p:grpSpPr>
-      <p:sp>
-        <p:nvSpPr>
-          <p:cNvPr id="2" name="Titre 1">
-            <a:extLst>
-              <a:ext uri="{FF2B5EF4-FFF2-40B4-BE49-F238E27FC236}">
-                <a16:creationId xmlns:a16="http://schemas.microsoft.com/office/drawing/2014/main" id="{1CFEABE6-08D5-1D21-B833-54F76F51035B}"/>
-              </a:ext>
-            </a:extLst>
-          </p:cNvPr>
-          <p:cNvSpPr>
-            <a:spLocks noGrp="1"/>
-          </p:cNvSpPr>
-          <p:nvPr>
-            <p:ph type="title"/>
-          </p:nvPr>
-        </p:nvSpPr>
-        <p:spPr/>
-        <p:txBody>
-          <a:bodyPr/>
-          <a:lstStyle/>
-          <a:p>
-            <a:r>
-              <a:rPr lang="fr-FR" dirty="0"/>
-              <a:t>PWM Initialisation</a:t>
-            </a:r>
-          </a:p>
-        </p:txBody>
-      </p:sp>
-      <p:sp>
-        <p:nvSpPr>
-          <p:cNvPr id="3" name="Espace réservé du contenu 2">
-            <a:extLst>
-              <a:ext uri="{FF2B5EF4-FFF2-40B4-BE49-F238E27FC236}">
-                <a16:creationId xmlns:a16="http://schemas.microsoft.com/office/drawing/2014/main" id="{DA13F1E8-A103-DF2D-7AC5-2044DD2FEA62}"/>
-              </a:ext>
-            </a:extLst>
-          </p:cNvPr>
-          <p:cNvSpPr>
-            <a:spLocks noGrp="1"/>
-          </p:cNvSpPr>
-          <p:nvPr>
-            <p:ph idx="1"/>
-          </p:nvPr>
-        </p:nvSpPr>
-        <p:spPr/>
-        <p:txBody>
-          <a:bodyPr/>
-          <a:lstStyle/>
-          <a:p>
-            <a:r>
-              <a:rPr lang="fr-FR" dirty="0" err="1"/>
-              <a:t>from</a:t>
-            </a:r>
-            <a:r>
-              <a:rPr lang="fr-FR" dirty="0"/>
-              <a:t> machine import Pin, PWM</a:t>
-            </a:r>
-          </a:p>
-          <a:p>
-            <a:r>
-              <a:rPr lang="fr-FR" dirty="0"/>
-              <a:t>pwm4 = PWM(Pin(4), </a:t>
-            </a:r>
-            <a:r>
-              <a:rPr lang="fr-FR" dirty="0" err="1"/>
-              <a:t>freq</a:t>
-            </a:r>
-            <a:r>
-              <a:rPr lang="fr-FR" dirty="0"/>
-              <a:t>=5000, duty_u16=65536)</a:t>
-            </a:r>
-          </a:p>
-          <a:p>
-            <a:endParaRPr lang="fr-FR" dirty="0"/>
-          </a:p>
-          <a:p>
-            <a:r>
-              <a:rPr lang="fr-FR" dirty="0" err="1"/>
-              <a:t>freq</a:t>
-            </a:r>
-            <a:r>
-              <a:rPr lang="fr-FR" dirty="0"/>
-              <a:t> = fréquence du PWM</a:t>
-            </a:r>
-          </a:p>
-          <a:p>
-            <a:pPr lvl="1"/>
-            <a:r>
-              <a:rPr lang="fr-FR" dirty="0"/>
-              <a:t>De 1Hz à 40MHz</a:t>
-            </a:r>
-          </a:p>
-          <a:p>
-            <a:pPr lvl="1"/>
-            <a:r>
-              <a:rPr lang="fr-FR" dirty="0"/>
-              <a:t>+ élevé = + précis = + CPU</a:t>
-            </a:r>
-          </a:p>
-          <a:p>
-            <a:pPr lvl="1"/>
-            <a:r>
-              <a:rPr lang="fr-FR" dirty="0"/>
-              <a:t>duty_u16 = range des valeurs, de 0 à 2**16</a:t>
-            </a:r>
-          </a:p>
-        </p:txBody>
-      </p:sp>
-    </p:spTree>
-    <p:extLst>
-      <p:ext uri="{BB962C8B-B14F-4D97-AF65-F5344CB8AC3E}">
-        <p14:creationId xmlns:p14="http://schemas.microsoft.com/office/powerpoint/2010/main" val="3403515831"/>
-      </p:ext>
-    </p:extLst>
-  </p:cSld>
-  <p:clrMapOvr>
-    <a:masterClrMapping/>
-  </p:clrMapOvr>
-</p:sld>
-</file>
-
 <file path=ppt/slides/slide23.xml><?xml version="1.0" encoding="utf-8"?>
 <p:sld xmlns:a="http://schemas.openxmlformats.org/drawingml/2006/main" xmlns:r="http://schemas.openxmlformats.org/officeDocument/2006/relationships" xmlns:p="http://schemas.openxmlformats.org/presentationml/2006/main">
   <p:cSld>
@@ -6019,7 +5967,7 @@
           <p:cNvPr id="2" name="Titre 1">
             <a:extLst>
               <a:ext uri="{FF2B5EF4-FFF2-40B4-BE49-F238E27FC236}">
-                <a16:creationId xmlns:a16="http://schemas.microsoft.com/office/drawing/2014/main" id="{E7D408BD-C6F9-642E-C33C-1D4BE25A1C60}"/>
+                <a16:creationId xmlns:a16="http://schemas.microsoft.com/office/drawing/2014/main" id="{1CFEABE6-08D5-1D21-B833-54F76F51035B}"/>
               </a:ext>
             </a:extLst>
           </p:cNvPr>
@@ -6037,7 +5985,7 @@
           <a:p>
             <a:r>
               <a:rPr lang="fr-FR" dirty="0"/>
-              <a:t>PWM Lecture</a:t>
+              <a:t>PWM Initialisation</a:t>
             </a:r>
           </a:p>
         </p:txBody>
@@ -6047,7 +5995,7 @@
           <p:cNvPr id="3" name="Espace réservé du contenu 2">
             <a:extLst>
               <a:ext uri="{FF2B5EF4-FFF2-40B4-BE49-F238E27FC236}">
-                <a16:creationId xmlns:a16="http://schemas.microsoft.com/office/drawing/2014/main" id="{F18765E0-7715-696D-A6DE-8B02A4813031}"/>
+                <a16:creationId xmlns:a16="http://schemas.microsoft.com/office/drawing/2014/main" id="{DA13F1E8-A103-DF2D-7AC5-2044DD2FEA62}"/>
               </a:ext>
             </a:extLst>
           </p:cNvPr>
@@ -6064,53 +6012,66 @@
           <a:lstStyle/>
           <a:p>
             <a:r>
-              <a:rPr lang="pl-PL" dirty="0"/>
-              <a:t>pwm.duty_u16(</a:t>
-            </a:r>
-            <a:r>
-              <a:rPr lang="fr-FR" dirty="0"/>
-              <a:t>value</a:t>
-            </a:r>
-            <a:r>
-              <a:rPr lang="pl-PL" dirty="0"/>
-              <a:t>)</a:t>
-            </a:r>
-            <a:endParaRPr lang="fr-FR" dirty="0"/>
-          </a:p>
-          <a:p>
-            <a:pPr lvl="1"/>
-            <a:r>
-              <a:rPr lang="fr-FR" dirty="0"/>
-              <a:t>Ecrit la donnée en 16 bits</a:t>
-            </a:r>
-          </a:p>
-          <a:p>
-            <a:r>
               <a:rPr lang="fr-FR" dirty="0" err="1"/>
-              <a:t>pwm_duty</a:t>
-            </a:r>
-            <a:r>
-              <a:rPr lang="fr-FR" dirty="0"/>
-              <a:t>(value)</a:t>
-            </a:r>
-          </a:p>
-          <a:p>
-            <a:pPr lvl="1"/>
-            <a:r>
-              <a:rPr lang="fr-FR" dirty="0"/>
-              <a:t>Ecrit la donnée en 10 bits</a:t>
-            </a:r>
-          </a:p>
-          <a:p>
-            <a:pPr lvl="1"/>
-            <a:endParaRPr lang="fr-FR" dirty="0"/>
+              <a:t>from</a:t>
+            </a:r>
+            <a:r>
+              <a:rPr lang="fr-FR" dirty="0"/>
+              <a:t> machine import Pin, PWM</a:t>
+            </a:r>
+          </a:p>
+          <a:p>
+            <a:r>
+              <a:rPr lang="fr-FR" dirty="0"/>
+              <a:t>pwm4 = PWM(Pin(4), </a:t>
+            </a:r>
+            <a:r>
+              <a:rPr lang="fr-FR" dirty="0" err="1"/>
+              <a:t>freq</a:t>
+            </a:r>
+            <a:r>
+              <a:rPr lang="fr-FR" dirty="0"/>
+              <a:t>=5000, duty_u16=65536)</a:t>
+            </a:r>
+          </a:p>
+          <a:p>
+            <a:pPr lvl="1"/>
+            <a:r>
+              <a:rPr lang="fr-FR" dirty="0" err="1"/>
+              <a:t>freq</a:t>
+            </a:r>
+            <a:r>
+              <a:rPr lang="fr-FR" dirty="0"/>
+              <a:t> = fréquence du PWM</a:t>
+            </a:r>
+          </a:p>
+          <a:p>
+            <a:pPr lvl="1"/>
+            <a:r>
+              <a:rPr lang="fr-FR" dirty="0"/>
+              <a:t>De 1Hz à 40MHz</a:t>
+            </a:r>
+          </a:p>
+          <a:p>
+            <a:pPr lvl="1"/>
+            <a:r>
+              <a:rPr lang="fr-FR" dirty="0"/>
+              <a:t>+ élevé = + précis = + CPU</a:t>
+            </a:r>
+          </a:p>
+          <a:p>
+            <a:pPr lvl="1"/>
+            <a:r>
+              <a:rPr lang="fr-FR" dirty="0"/>
+              <a:t>duty_u16 = range des valeurs, de 0 à 2**16</a:t>
+            </a:r>
           </a:p>
         </p:txBody>
       </p:sp>
     </p:spTree>
     <p:extLst>
       <p:ext uri="{BB962C8B-B14F-4D97-AF65-F5344CB8AC3E}">
-        <p14:creationId xmlns:p14="http://schemas.microsoft.com/office/powerpoint/2010/main" val="1176580070"/>
+        <p14:creationId xmlns:p14="http://schemas.microsoft.com/office/powerpoint/2010/main" val="3403515831"/>
       </p:ext>
     </p:extLst>
   </p:cSld>
@@ -6139,6 +6100,129 @@
       </p:grpSpPr>
       <p:sp>
         <p:nvSpPr>
+          <p:cNvPr id="2" name="Titre 1">
+            <a:extLst>
+              <a:ext uri="{FF2B5EF4-FFF2-40B4-BE49-F238E27FC236}">
+                <a16:creationId xmlns:a16="http://schemas.microsoft.com/office/drawing/2014/main" id="{E7D408BD-C6F9-642E-C33C-1D4BE25A1C60}"/>
+              </a:ext>
+            </a:extLst>
+          </p:cNvPr>
+          <p:cNvSpPr>
+            <a:spLocks noGrp="1"/>
+          </p:cNvSpPr>
+          <p:nvPr>
+            <p:ph type="title"/>
+          </p:nvPr>
+        </p:nvSpPr>
+        <p:spPr/>
+        <p:txBody>
+          <a:bodyPr/>
+          <a:lstStyle/>
+          <a:p>
+            <a:r>
+              <a:rPr lang="fr-FR" dirty="0"/>
+              <a:t>PWM Lecture</a:t>
+            </a:r>
+          </a:p>
+        </p:txBody>
+      </p:sp>
+      <p:sp>
+        <p:nvSpPr>
+          <p:cNvPr id="3" name="Espace réservé du contenu 2">
+            <a:extLst>
+              <a:ext uri="{FF2B5EF4-FFF2-40B4-BE49-F238E27FC236}">
+                <a16:creationId xmlns:a16="http://schemas.microsoft.com/office/drawing/2014/main" id="{F18765E0-7715-696D-A6DE-8B02A4813031}"/>
+              </a:ext>
+            </a:extLst>
+          </p:cNvPr>
+          <p:cNvSpPr>
+            <a:spLocks noGrp="1"/>
+          </p:cNvSpPr>
+          <p:nvPr>
+            <p:ph idx="1"/>
+          </p:nvPr>
+        </p:nvSpPr>
+        <p:spPr/>
+        <p:txBody>
+          <a:bodyPr/>
+          <a:lstStyle/>
+          <a:p>
+            <a:r>
+              <a:rPr lang="pl-PL" dirty="0"/>
+              <a:t>pwm.duty_u16(</a:t>
+            </a:r>
+            <a:r>
+              <a:rPr lang="fr-FR" dirty="0"/>
+              <a:t>value</a:t>
+            </a:r>
+            <a:r>
+              <a:rPr lang="pl-PL" dirty="0"/>
+              <a:t>)</a:t>
+            </a:r>
+            <a:endParaRPr lang="fr-FR" dirty="0"/>
+          </a:p>
+          <a:p>
+            <a:pPr lvl="1"/>
+            <a:r>
+              <a:rPr lang="fr-FR" dirty="0"/>
+              <a:t>Ecrit la donnée en 16 bits</a:t>
+            </a:r>
+          </a:p>
+          <a:p>
+            <a:r>
+              <a:rPr lang="fr-FR" dirty="0" err="1"/>
+              <a:t>pwm_duty</a:t>
+            </a:r>
+            <a:r>
+              <a:rPr lang="fr-FR" dirty="0"/>
+              <a:t>(value)</a:t>
+            </a:r>
+          </a:p>
+          <a:p>
+            <a:pPr lvl="1"/>
+            <a:r>
+              <a:rPr lang="fr-FR" dirty="0"/>
+              <a:t>Ecrit la donnée en 10 bits</a:t>
+            </a:r>
+          </a:p>
+          <a:p>
+            <a:pPr lvl="1"/>
+            <a:endParaRPr lang="fr-FR" dirty="0"/>
+          </a:p>
+        </p:txBody>
+      </p:sp>
+    </p:spTree>
+    <p:extLst>
+      <p:ext uri="{BB962C8B-B14F-4D97-AF65-F5344CB8AC3E}">
+        <p14:creationId xmlns:p14="http://schemas.microsoft.com/office/powerpoint/2010/main" val="1176580070"/>
+      </p:ext>
+    </p:extLst>
+  </p:cSld>
+  <p:clrMapOvr>
+    <a:masterClrMapping/>
+  </p:clrMapOvr>
+</p:sld>
+</file>
+
+<file path=ppt/slides/slide25.xml><?xml version="1.0" encoding="utf-8"?>
+<p:sld xmlns:a="http://schemas.openxmlformats.org/drawingml/2006/main" xmlns:r="http://schemas.openxmlformats.org/officeDocument/2006/relationships" xmlns:p="http://schemas.openxmlformats.org/presentationml/2006/main">
+  <p:cSld>
+    <p:spTree>
+      <p:nvGrpSpPr>
+        <p:cNvPr id="1" name=""/>
+        <p:cNvGrpSpPr/>
+        <p:nvPr/>
+      </p:nvGrpSpPr>
+      <p:grpSpPr>
+        <a:xfrm>
+          <a:off x="0" y="0"/>
+          <a:ext cx="0" cy="0"/>
+          <a:chOff x="0" y="0"/>
+          <a:chExt cx="0" cy="0"/>
+        </a:xfrm>
+      </p:grpSpPr>
+      <p:sp>
+        <p:nvSpPr>
           <p:cNvPr id="2" name="Titre 1"/>
           <p:cNvSpPr>
             <a:spLocks noGrp="1"/>
@@ -6201,7 +6285,7 @@
             <a:pPr lvl="1"/>
             <a:r>
               <a:rPr lang="en-US" dirty="0"/>
-              <a:t>pwm2.duty_u16(val16) </a:t>
+              <a:t>pwm2.duty_u16(val16</a:t>
             </a:r>
           </a:p>
           <a:p>
@@ -6232,7 +6316,35 @@
             </a:r>
             <a:r>
               <a:rPr lang="en-US" dirty="0" err="1"/>
-              <a:t>potentiomètre</a:t>
+              <a:t>potentiometre</a:t>
+            </a:r>
+            <a:endParaRPr lang="en-US" dirty="0"/>
+          </a:p>
+          <a:p>
+            <a:pPr lvl="1"/>
+            <a:r>
+              <a:rPr lang="en-US" dirty="0"/>
+              <a:t>val16 </a:t>
+            </a:r>
+            <a:r>
+              <a:rPr lang="en-US" dirty="0" err="1"/>
+              <a:t>est</a:t>
+            </a:r>
+            <a:r>
+              <a:rPr lang="en-US" dirty="0"/>
+              <a:t> la </a:t>
+            </a:r>
+            <a:r>
+              <a:rPr lang="en-US" dirty="0" err="1"/>
+              <a:t>valeur</a:t>
+            </a:r>
+            <a:r>
+              <a:rPr lang="en-US" dirty="0"/>
+              <a:t> du </a:t>
+            </a:r>
+            <a:r>
+              <a:rPr lang="en-US" dirty="0" err="1"/>
+              <a:t>potentiomère</a:t>
             </a:r>
             <a:endParaRPr lang="fr-FR" dirty="0"/>
           </a:p>
@@ -6251,7 +6363,7 @@
 </p:sld>
 </file>
 
-<file path=ppt/slides/slide25.xml><?xml version="1.0" encoding="utf-8"?>
+<file path=ppt/slides/slide26.xml><?xml version="1.0" encoding="utf-8"?>
 <p:sld xmlns:a="http://schemas.openxmlformats.org/drawingml/2006/main" xmlns:r="http://schemas.openxmlformats.org/officeDocument/2006/relationships" xmlns:p="http://schemas.openxmlformats.org/presentationml/2006/main">
   <p:cSld>
     <p:spTree>
@@ -6386,7 +6498,7 @@
 </p:sld>
 </file>
 
-<file path=ppt/slides/slide26.xml><?xml version="1.0" encoding="utf-8"?>
+<file path=ppt/slides/slide27.xml><?xml version="1.0" encoding="utf-8"?>
 <p:sld xmlns:a="http://schemas.openxmlformats.org/drawingml/2006/main" xmlns:r="http://schemas.openxmlformats.org/officeDocument/2006/relationships" xmlns:p="http://schemas.openxmlformats.org/presentationml/2006/main">
   <p:cSld>
     <p:spTree>
@@ -6518,7 +6630,7 @@
 </p:sld>
 </file>
 
-<file path=ppt/slides/slide27.xml><?xml version="1.0" encoding="utf-8"?>
+<file path=ppt/slides/slide28.xml><?xml version="1.0" encoding="utf-8"?>
 <p:sld xmlns:a="http://schemas.openxmlformats.org/drawingml/2006/main" xmlns:r="http://schemas.openxmlformats.org/officeDocument/2006/relationships" xmlns:p="http://schemas.openxmlformats.org/presentationml/2006/main">
   <p:cSld>
     <p:spTree>
@@ -6637,7 +6749,7 @@
 </p:sld>
 </file>
 
-<file path=ppt/slides/slide28.xml><?xml version="1.0" encoding="utf-8"?>
+<file path=ppt/slides/slide29.xml><?xml version="1.0" encoding="utf-8"?>
 <p:sld xmlns:a="http://schemas.openxmlformats.org/drawingml/2006/main" xmlns:r="http://schemas.openxmlformats.org/officeDocument/2006/relationships" xmlns:p="http://schemas.openxmlformats.org/presentationml/2006/main">
   <p:cSld>
     <p:spTree>
@@ -6719,13 +6831,6 @@
             <a:pPr lvl="1"/>
             <a:r>
               <a:rPr lang="fr-FR" dirty="0"/>
-              <a:t>dont 200mA pour tous les pins</a:t>
-            </a:r>
-          </a:p>
-          <a:p>
-            <a:pPr lvl="1"/>
-            <a:r>
-              <a:rPr lang="fr-FR" dirty="0"/>
               <a:t>Alimentation VIN limité à 1A en 5V soit 5W</a:t>
             </a:r>
           </a:p>
@@ -6733,7 +6838,7 @@
             <a:pPr lvl="1"/>
             <a:r>
               <a:rPr lang="fr-FR" dirty="0"/>
-              <a:t>dont 500mA pour tous les pins</a:t>
+              <a:t>L'ensemble des pins sont limités à 200mA</a:t>
             </a:r>
           </a:p>
           <a:p>
@@ -6746,15 +6851,7 @@
           <a:p>
             <a:r>
               <a:rPr lang="fr-FR" dirty="0"/>
-              <a:t>Pour alimenter plus que les </a:t>
-            </a:r>
-            <a:r>
-              <a:rPr lang="fr-FR" dirty="0" err="1"/>
-              <a:t>limittes</a:t>
-            </a:r>
-            <a:r>
-              <a:rPr lang="fr-FR" dirty="0"/>
-              <a:t> il faut un relais de puissance par transistor NPN</a:t>
+              <a:t>Pour alimenter plus que les limites il faut un relais de puissance par transistor NPN</a:t>
             </a:r>
           </a:p>
           <a:p>
@@ -6776,7 +6873,141 @@
 </p:sld>
 </file>
 
-<file path=ppt/slides/slide29.xml><?xml version="1.0" encoding="utf-8"?>
+<file path=ppt/slides/slide3.xml><?xml version="1.0" encoding="utf-8"?>
+<p:sld xmlns:a="http://schemas.openxmlformats.org/drawingml/2006/main" xmlns:r="http://schemas.openxmlformats.org/officeDocument/2006/relationships" xmlns:p="http://schemas.openxmlformats.org/presentationml/2006/main">
+  <p:cSld>
+    <p:spTree>
+      <p:nvGrpSpPr>
+        <p:cNvPr id="1" name=""/>
+        <p:cNvGrpSpPr/>
+        <p:nvPr/>
+      </p:nvGrpSpPr>
+      <p:grpSpPr>
+        <a:xfrm>
+          <a:off x="0" y="0"/>
+          <a:ext cx="0" cy="0"/>
+          <a:chOff x="0" y="0"/>
+          <a:chExt cx="0" cy="0"/>
+        </a:xfrm>
+      </p:grpSpPr>
+      <p:sp>
+        <p:nvSpPr>
+          <p:cNvPr id="2" name="Titre 1"/>
+          <p:cNvSpPr>
+            <a:spLocks noGrp="1"/>
+          </p:cNvSpPr>
+          <p:nvPr>
+            <p:ph type="title"/>
+          </p:nvPr>
+        </p:nvSpPr>
+        <p:spPr/>
+        <p:txBody>
+          <a:bodyPr/>
+          <a:lstStyle/>
+          <a:p>
+            <a:r>
+              <a:rPr lang="fr-FR" dirty="0"/>
+              <a:t>Time</a:t>
+            </a:r>
+          </a:p>
+        </p:txBody>
+      </p:sp>
+      <p:sp>
+        <p:nvSpPr>
+          <p:cNvPr id="3" name="Espace réservé du contenu 2"/>
+          <p:cNvSpPr>
+            <a:spLocks noGrp="1"/>
+          </p:cNvSpPr>
+          <p:nvPr>
+            <p:ph idx="1"/>
+          </p:nvPr>
+        </p:nvSpPr>
+        <p:spPr/>
+        <p:txBody>
+          <a:bodyPr/>
+          <a:lstStyle/>
+          <a:p>
+            <a:r>
+              <a:rPr lang="fr-FR" dirty="0"/>
+              <a:t>Une boucle est trop rapide</a:t>
+            </a:r>
+          </a:p>
+          <a:p>
+            <a:r>
+              <a:rPr lang="fr-FR" dirty="0"/>
+              <a:t>Le module time possède les fonctions de </a:t>
+            </a:r>
+            <a:r>
+              <a:rPr lang="fr-FR" dirty="0" err="1"/>
+              <a:t>sleep</a:t>
+            </a:r>
+            <a:endParaRPr lang="fr-FR" dirty="0"/>
+          </a:p>
+          <a:p>
+            <a:r>
+              <a:rPr lang="fr-FR" dirty="0" err="1"/>
+              <a:t>sleep</a:t>
+            </a:r>
+            <a:r>
+              <a:rPr lang="fr-FR" dirty="0"/>
+              <a:t>() permet d'effectuer une pause en seconde</a:t>
+            </a:r>
+          </a:p>
+          <a:p>
+            <a:r>
+              <a:rPr lang="fr-FR" dirty="0" err="1"/>
+              <a:t>sleep_ms</a:t>
+            </a:r>
+            <a:r>
+              <a:rPr lang="fr-FR" dirty="0"/>
+              <a:t>() permet d'effectuer une pause en milliseconde</a:t>
+            </a:r>
+          </a:p>
+          <a:p>
+            <a:r>
+              <a:rPr lang="fr-FR" dirty="0" err="1"/>
+              <a:t>sleep_ms</a:t>
+            </a:r>
+            <a:r>
+              <a:rPr lang="fr-FR" dirty="0"/>
+              <a:t>(1000)</a:t>
+            </a:r>
+          </a:p>
+          <a:p>
+            <a:pPr lvl="1"/>
+            <a:r>
+              <a:rPr lang="fr-FR" dirty="0"/>
+              <a:t>Pause de 1s</a:t>
+            </a:r>
+          </a:p>
+          <a:p>
+            <a:pPr lvl="1"/>
+            <a:r>
+              <a:rPr lang="fr-FR" dirty="0"/>
+              <a:t>Quasi obligatoire dans un </a:t>
+            </a:r>
+            <a:r>
+              <a:rPr lang="fr-FR" dirty="0" err="1"/>
+              <a:t>loop</a:t>
+            </a:r>
+            <a:endParaRPr lang="fr-FR" dirty="0"/>
+          </a:p>
+        </p:txBody>
+      </p:sp>
+    </p:spTree>
+    <p:extLst>
+      <p:ext uri="{BB962C8B-B14F-4D97-AF65-F5344CB8AC3E}">
+        <p14:creationId xmlns:p14="http://schemas.microsoft.com/office/powerpoint/2010/main" val="370465397"/>
+      </p:ext>
+    </p:extLst>
+  </p:cSld>
+  <p:clrMapOvr>
+    <a:masterClrMapping/>
+  </p:clrMapOvr>
+</p:sld>
+</file>
+
+<file path=ppt/slides/slide30.xml><?xml version="1.0" encoding="utf-8"?>
 <p:sld xmlns:a="http://schemas.openxmlformats.org/drawingml/2006/main" xmlns:r="http://schemas.openxmlformats.org/officeDocument/2006/relationships" xmlns:p="http://schemas.openxmlformats.org/presentationml/2006/main">
   <p:cSld>
     <p:spTree>
@@ -6920,141 +7151,7 @@
 </p:sld>
 </file>
 
-<file path=ppt/slides/slide3.xml><?xml version="1.0" encoding="utf-8"?>
-<p:sld xmlns:a="http://schemas.openxmlformats.org/drawingml/2006/main" xmlns:r="http://schemas.openxmlformats.org/officeDocument/2006/relationships" xmlns:p="http://schemas.openxmlformats.org/presentationml/2006/main">
-  <p:cSld>
-    <p:spTree>
-      <p:nvGrpSpPr>
-        <p:cNvPr id="1" name=""/>
-        <p:cNvGrpSpPr/>
-        <p:nvPr/>
-      </p:nvGrpSpPr>
-      <p:grpSpPr>
-        <a:xfrm>
-          <a:off x="0" y="0"/>
-          <a:ext cx="0" cy="0"/>
-          <a:chOff x="0" y="0"/>
-          <a:chExt cx="0" cy="0"/>
-        </a:xfrm>
-      </p:grpSpPr>
-      <p:sp>
-        <p:nvSpPr>
-          <p:cNvPr id="2" name="Titre 1"/>
-          <p:cNvSpPr>
-            <a:spLocks noGrp="1"/>
-          </p:cNvSpPr>
-          <p:nvPr>
-            <p:ph type="title"/>
-          </p:nvPr>
-        </p:nvSpPr>
-        <p:spPr/>
-        <p:txBody>
-          <a:bodyPr/>
-          <a:lstStyle/>
-          <a:p>
-            <a:r>
-              <a:rPr lang="fr-FR" dirty="0"/>
-              <a:t>Time</a:t>
-            </a:r>
-          </a:p>
-        </p:txBody>
-      </p:sp>
-      <p:sp>
-        <p:nvSpPr>
-          <p:cNvPr id="3" name="Espace réservé du contenu 2"/>
-          <p:cNvSpPr>
-            <a:spLocks noGrp="1"/>
-          </p:cNvSpPr>
-          <p:nvPr>
-            <p:ph idx="1"/>
-          </p:nvPr>
-        </p:nvSpPr>
-        <p:spPr/>
-        <p:txBody>
-          <a:bodyPr/>
-          <a:lstStyle/>
-          <a:p>
-            <a:r>
-              <a:rPr lang="fr-FR" dirty="0"/>
-              <a:t>Une boucle est trop rapide</a:t>
-            </a:r>
-          </a:p>
-          <a:p>
-            <a:r>
-              <a:rPr lang="fr-FR" dirty="0"/>
-              <a:t>Le module time possède les fonctions de </a:t>
-            </a:r>
-            <a:r>
-              <a:rPr lang="fr-FR" dirty="0" err="1"/>
-              <a:t>sleep</a:t>
-            </a:r>
-            <a:endParaRPr lang="fr-FR" dirty="0"/>
-          </a:p>
-          <a:p>
-            <a:r>
-              <a:rPr lang="fr-FR" dirty="0" err="1"/>
-              <a:t>sleep</a:t>
-            </a:r>
-            <a:r>
-              <a:rPr lang="fr-FR" dirty="0"/>
-              <a:t>() permet d'effectuer une pause en seconde</a:t>
-            </a:r>
-          </a:p>
-          <a:p>
-            <a:r>
-              <a:rPr lang="fr-FR" dirty="0" err="1"/>
-              <a:t>sleep_ms</a:t>
-            </a:r>
-            <a:r>
-              <a:rPr lang="fr-FR" dirty="0"/>
-              <a:t>() permet d'effectuer une pause en milliseconde</a:t>
-            </a:r>
-          </a:p>
-          <a:p>
-            <a:r>
-              <a:rPr lang="fr-FR" dirty="0" err="1"/>
-              <a:t>sleep_ms</a:t>
-            </a:r>
-            <a:r>
-              <a:rPr lang="fr-FR" dirty="0"/>
-              <a:t>(1000)</a:t>
-            </a:r>
-          </a:p>
-          <a:p>
-            <a:pPr lvl="1"/>
-            <a:r>
-              <a:rPr lang="fr-FR" dirty="0"/>
-              <a:t>Pause de 1s</a:t>
-            </a:r>
-          </a:p>
-          <a:p>
-            <a:pPr lvl="1"/>
-            <a:r>
-              <a:rPr lang="fr-FR" dirty="0"/>
-              <a:t>Quasi obligatoire dans un </a:t>
-            </a:r>
-            <a:r>
-              <a:rPr lang="fr-FR" dirty="0" err="1"/>
-              <a:t>loop</a:t>
-            </a:r>
-            <a:endParaRPr lang="fr-FR" dirty="0"/>
-          </a:p>
-        </p:txBody>
-      </p:sp>
-    </p:spTree>
-    <p:extLst>
-      <p:ext uri="{BB962C8B-B14F-4D97-AF65-F5344CB8AC3E}">
-        <p14:creationId xmlns:p14="http://schemas.microsoft.com/office/powerpoint/2010/main" val="370465397"/>
-      </p:ext>
-    </p:extLst>
-  </p:cSld>
-  <p:clrMapOvr>
-    <a:masterClrMapping/>
-  </p:clrMapOvr>
-</p:sld>
-</file>
-
-<file path=ppt/slides/slide30.xml><?xml version="1.0" encoding="utf-8"?>
+<file path=ppt/slides/slide31.xml><?xml version="1.0" encoding="utf-8"?>
 <p:sld xmlns:a="http://schemas.openxmlformats.org/drawingml/2006/main" xmlns:r="http://schemas.openxmlformats.org/officeDocument/2006/relationships" xmlns:p="http://schemas.openxmlformats.org/presentationml/2006/main">
   <p:cSld>
     <p:spTree>
@@ -7298,7 +7395,7 @@
 </p:sld>
 </file>
 
-<file path=ppt/slides/slide31.xml><?xml version="1.0" encoding="utf-8"?>
+<file path=ppt/slides/slide32.xml><?xml version="1.0" encoding="utf-8"?>
 <p:sld xmlns:a="http://schemas.openxmlformats.org/drawingml/2006/main" xmlns:r="http://schemas.openxmlformats.org/officeDocument/2006/relationships" xmlns:p="http://schemas.openxmlformats.org/presentationml/2006/main">
   <p:cSld>
     <p:spTree>

--- a/ppt/IoT19-MicropythonDev.pptx
+++ b/ppt/IoT19-MicropythonDev.pptx
@@ -5624,12 +5624,6 @@
           <a:p>
             <a:r>
               <a:rPr lang="fr-FR" sz="2400" kern="0" dirty="0"/>
-              <a:t>Branché sur D15 avec R=22KOhm</a:t>
-            </a:r>
-          </a:p>
-          <a:p>
-            <a:r>
-              <a:rPr lang="fr-FR" sz="2400" kern="0" dirty="0"/>
               <a:t>Pins Grove</a:t>
             </a:r>
           </a:p>
@@ -6121,7 +6115,7 @@
           <a:p>
             <a:r>
               <a:rPr lang="fr-FR" dirty="0"/>
-              <a:t>PWM Lecture</a:t>
+              <a:t>PWM Ecriture</a:t>
             </a:r>
           </a:p>
         </p:txBody>
@@ -6316,7 +6310,7 @@
             </a:r>
             <a:r>
               <a:rPr lang="en-US" dirty="0" err="1"/>
-              <a:t>potentiometre</a:t>
+              <a:t>potentiomètre</a:t>
             </a:r>
             <a:endParaRPr lang="en-US" dirty="0"/>
           </a:p>
@@ -6344,7 +6338,7 @@
             </a:r>
             <a:r>
               <a:rPr lang="en-US" dirty="0" err="1"/>
-              <a:t>potentiomère</a:t>
+              <a:t>potentiomètre</a:t>
             </a:r>
             <a:endParaRPr lang="fr-FR" dirty="0"/>
           </a:p>
